--- a/exports/pptx/lessons/primary-module-11-multiplication-near-base/day-02-twins-chant.pptx
+++ b/exports/pptx/lessons/primary-module-11-multiplication-near-base/day-02-twins-chant.pptx
@@ -16,9 +16,12 @@
     <p:sldId id="264" r:id="rId10"/>
     <p:sldId id="265" r:id="rId11"/>
     <p:sldId id="266" r:id="rId12"/>
+    <p:sldId id="267" r:id="rId13"/>
+    <p:sldId id="268" r:id="rId14"/>
+    <p:sldId id="269" r:id="rId15"/>
   </p:sldIdLst>
   <p:notesMasterIdLst>
-    <p:notesMasterId r:id="rId13"/>
+    <p:notesMasterId r:id="rId16"/>
   </p:notesMasterIdLst>
   <p:sldSz cx="9144000" cy="5143500"/>
   <p:notesSz cx="5143500" cy="9144000"/>
@@ -712,6 +715,270 @@
             <a:fld id="{F7021451-1387-4CA6-816F-3879F97B5CBC}" type="slidenum">
               <a:rPr lang="en-US"/>
               <a:t>11</a:t>
+            </a:fld>
+            <a:endParaRPr lang="en-US"/>
+          </a:p>
+        </p:txBody>
+      </p:sp>
+    </p:spTree>
+    <p:extLst>
+      <p:ext uri="{BB962C8B-B14F-4D97-AF65-F5344CB8AC3E}">
+        <p14:creationId xmlns:p14="http://schemas.microsoft.com/office/powerpoint/2010/main" val="1024086991"/>
+      </p:ext>
+    </p:extLst>
+  </p:cSld>
+  <p:clrMapOvr>
+    <a:masterClrMapping/>
+  </p:clrMapOvr>
+</p:notes>
+</file>
+
+<file path=ppt/notesSlides/notesSlide12.xml><?xml version="1.0" encoding="utf-8"?>
+<p:notes xmlns:a="http://schemas.openxmlformats.org/drawingml/2006/main" xmlns:r="http://schemas.openxmlformats.org/officeDocument/2006/relationships" xmlns:p="http://schemas.openxmlformats.org/presentationml/2006/main">
+  <p:cSld>
+    <p:spTree>
+      <p:nvGrpSpPr>
+        <p:cNvPr id="1" name=""/>
+        <p:cNvGrpSpPr/>
+        <p:nvPr/>
+      </p:nvGrpSpPr>
+      <p:grpSpPr>
+        <a:xfrm>
+          <a:off x="0" y="0"/>
+          <a:ext cx="0" cy="0"/>
+          <a:chOff x="0" y="0"/>
+          <a:chExt cx="0" cy="0"/>
+        </a:xfrm>
+      </p:grpSpPr>
+      <p:sp>
+        <p:nvSpPr>
+          <p:cNvPr id="2" name="Slide Image Placeholder 1"/>
+          <p:cNvSpPr>
+            <a:spLocks noGrp="1" noRot="1" noChangeAspect="1"/>
+          </p:cNvSpPr>
+          <p:nvPr>
+            <p:ph type="sldImg"/>
+          </p:nvPr>
+        </p:nvSpPr>
+        <p:spPr/>
+      </p:sp>
+      <p:sp>
+        <p:nvSpPr>
+          <p:cNvPr id="3" name="Notes Placeholder 2"/>
+          <p:cNvSpPr>
+            <a:spLocks noGrp="1"/>
+          </p:cNvSpPr>
+          <p:nvPr>
+            <p:ph type="body" idx="1"/>
+          </p:nvPr>
+        </p:nvSpPr>
+        <p:spPr/>
+        <p:txBody>
+          <a:bodyPr/>
+          <a:lstStyle/>
+          <a:p>
+            <a:r>
+              <a:rPr lang="en-US" dirty="0"/>
+              <a:t/>
+            </a:r>
+            <a:endParaRPr lang="en-US" dirty="0"/>
+          </a:p>
+        </p:txBody>
+      </p:sp>
+      <p:sp>
+        <p:nvSpPr>
+          <p:cNvPr id="4" name="Slide Number Placeholder 3"/>
+          <p:cNvSpPr>
+            <a:spLocks noGrp="1"/>
+          </p:cNvSpPr>
+          <p:nvPr>
+            <p:ph type="sldNum" sz="quarter" idx="10"/>
+          </p:nvPr>
+        </p:nvSpPr>
+        <p:spPr/>
+        <p:txBody>
+          <a:bodyPr/>
+          <a:lstStyle/>
+          <a:p>
+            <a:fld id="{F7021451-1387-4CA6-816F-3879F97B5CBC}" type="slidenum">
+              <a:rPr lang="en-US"/>
+              <a:t>12</a:t>
+            </a:fld>
+            <a:endParaRPr lang="en-US"/>
+          </a:p>
+        </p:txBody>
+      </p:sp>
+    </p:spTree>
+    <p:extLst>
+      <p:ext uri="{BB962C8B-B14F-4D97-AF65-F5344CB8AC3E}">
+        <p14:creationId xmlns:p14="http://schemas.microsoft.com/office/powerpoint/2010/main" val="1024086991"/>
+      </p:ext>
+    </p:extLst>
+  </p:cSld>
+  <p:clrMapOvr>
+    <a:masterClrMapping/>
+  </p:clrMapOvr>
+</p:notes>
+</file>
+
+<file path=ppt/notesSlides/notesSlide13.xml><?xml version="1.0" encoding="utf-8"?>
+<p:notes xmlns:a="http://schemas.openxmlformats.org/drawingml/2006/main" xmlns:r="http://schemas.openxmlformats.org/officeDocument/2006/relationships" xmlns:p="http://schemas.openxmlformats.org/presentationml/2006/main">
+  <p:cSld>
+    <p:spTree>
+      <p:nvGrpSpPr>
+        <p:cNvPr id="1" name=""/>
+        <p:cNvGrpSpPr/>
+        <p:nvPr/>
+      </p:nvGrpSpPr>
+      <p:grpSpPr>
+        <a:xfrm>
+          <a:off x="0" y="0"/>
+          <a:ext cx="0" cy="0"/>
+          <a:chOff x="0" y="0"/>
+          <a:chExt cx="0" cy="0"/>
+        </a:xfrm>
+      </p:grpSpPr>
+      <p:sp>
+        <p:nvSpPr>
+          <p:cNvPr id="2" name="Slide Image Placeholder 1"/>
+          <p:cNvSpPr>
+            <a:spLocks noGrp="1" noRot="1" noChangeAspect="1"/>
+          </p:cNvSpPr>
+          <p:nvPr>
+            <p:ph type="sldImg"/>
+          </p:nvPr>
+        </p:nvSpPr>
+        <p:spPr/>
+      </p:sp>
+      <p:sp>
+        <p:nvSpPr>
+          <p:cNvPr id="3" name="Notes Placeholder 2"/>
+          <p:cNvSpPr>
+            <a:spLocks noGrp="1"/>
+          </p:cNvSpPr>
+          <p:nvPr>
+            <p:ph type="body" idx="1"/>
+          </p:nvPr>
+        </p:nvSpPr>
+        <p:spPr/>
+        <p:txBody>
+          <a:bodyPr/>
+          <a:lstStyle/>
+          <a:p>
+            <a:r>
+              <a:rPr lang="en-US" dirty="0"/>
+              <a:t/>
+            </a:r>
+            <a:endParaRPr lang="en-US" dirty="0"/>
+          </a:p>
+        </p:txBody>
+      </p:sp>
+      <p:sp>
+        <p:nvSpPr>
+          <p:cNvPr id="4" name="Slide Number Placeholder 3"/>
+          <p:cNvSpPr>
+            <a:spLocks noGrp="1"/>
+          </p:cNvSpPr>
+          <p:nvPr>
+            <p:ph type="sldNum" sz="quarter" idx="10"/>
+          </p:nvPr>
+        </p:nvSpPr>
+        <p:spPr/>
+        <p:txBody>
+          <a:bodyPr/>
+          <a:lstStyle/>
+          <a:p>
+            <a:fld id="{F7021451-1387-4CA6-816F-3879F97B5CBC}" type="slidenum">
+              <a:rPr lang="en-US"/>
+              <a:t>13</a:t>
+            </a:fld>
+            <a:endParaRPr lang="en-US"/>
+          </a:p>
+        </p:txBody>
+      </p:sp>
+    </p:spTree>
+    <p:extLst>
+      <p:ext uri="{BB962C8B-B14F-4D97-AF65-F5344CB8AC3E}">
+        <p14:creationId xmlns:p14="http://schemas.microsoft.com/office/powerpoint/2010/main" val="1024086991"/>
+      </p:ext>
+    </p:extLst>
+  </p:cSld>
+  <p:clrMapOvr>
+    <a:masterClrMapping/>
+  </p:clrMapOvr>
+</p:notes>
+</file>
+
+<file path=ppt/notesSlides/notesSlide14.xml><?xml version="1.0" encoding="utf-8"?>
+<p:notes xmlns:a="http://schemas.openxmlformats.org/drawingml/2006/main" xmlns:r="http://schemas.openxmlformats.org/officeDocument/2006/relationships" xmlns:p="http://schemas.openxmlformats.org/presentationml/2006/main">
+  <p:cSld>
+    <p:spTree>
+      <p:nvGrpSpPr>
+        <p:cNvPr id="1" name=""/>
+        <p:cNvGrpSpPr/>
+        <p:nvPr/>
+      </p:nvGrpSpPr>
+      <p:grpSpPr>
+        <a:xfrm>
+          <a:off x="0" y="0"/>
+          <a:ext cx="0" cy="0"/>
+          <a:chOff x="0" y="0"/>
+          <a:chExt cx="0" cy="0"/>
+        </a:xfrm>
+      </p:grpSpPr>
+      <p:sp>
+        <p:nvSpPr>
+          <p:cNvPr id="2" name="Slide Image Placeholder 1"/>
+          <p:cNvSpPr>
+            <a:spLocks noGrp="1" noRot="1" noChangeAspect="1"/>
+          </p:cNvSpPr>
+          <p:nvPr>
+            <p:ph type="sldImg"/>
+          </p:nvPr>
+        </p:nvSpPr>
+        <p:spPr/>
+      </p:sp>
+      <p:sp>
+        <p:nvSpPr>
+          <p:cNvPr id="3" name="Notes Placeholder 2"/>
+          <p:cNvSpPr>
+            <a:spLocks noGrp="1"/>
+          </p:cNvSpPr>
+          <p:nvPr>
+            <p:ph type="body" idx="1"/>
+          </p:nvPr>
+        </p:nvSpPr>
+        <p:spPr/>
+        <p:txBody>
+          <a:bodyPr/>
+          <a:lstStyle/>
+          <a:p>
+            <a:r>
+              <a:rPr lang="en-US" dirty="0"/>
+              <a:t/>
+            </a:r>
+            <a:endParaRPr lang="en-US" dirty="0"/>
+          </a:p>
+        </p:txBody>
+      </p:sp>
+      <p:sp>
+        <p:nvSpPr>
+          <p:cNvPr id="4" name="Slide Number Placeholder 3"/>
+          <p:cNvSpPr>
+            <a:spLocks noGrp="1"/>
+          </p:cNvSpPr>
+          <p:nvPr>
+            <p:ph type="sldNum" sz="quarter" idx="10"/>
+          </p:nvPr>
+        </p:nvSpPr>
+        <p:spPr/>
+        <p:txBody>
+          <a:bodyPr/>
+          <a:lstStyle/>
+          <a:p>
+            <a:fld id="{F7021451-1387-4CA6-816F-3879F97B5CBC}" type="slidenum">
+              <a:rPr lang="en-US"/>
+              <a:t>14</a:t>
             </a:fld>
             <a:endParaRPr lang="en-US"/>
           </a:p>
@@ -1965,102 +2232,6 @@
         </p:nvSpPr>
         <p:spPr>
           <a:xfrm>
-            <a:off x="406301" y="1223963"/>
-            <a:ext cx="8498026" cy="274290"/>
-          </a:xfrm>
-          <a:prstGeom prst="rect">
-            <a:avLst/>
-          </a:prstGeom>
-          <a:noFill/>
-          <a:ln/>
-        </p:spPr>
-        <p:txBody>
-          <a:bodyPr wrap="square" lIns="0" tIns="0" rIns="0" bIns="0" rtlCol="0" anchor="t"/>
-          <a:lstStyle/>
-          <a:p>
-            <a:pPr algn="l" indent="0" marL="0">
-              <a:lnSpc>
-                <a:spcPts val="2160"/>
-              </a:lnSpc>
-              <a:spcBef>
-                <a:spcPts val="600"/>
-              </a:spcBef>
-              <a:spcAft>
-                <a:spcPts val="800"/>
-              </a:spcAft>
-              <a:buNone/>
-            </a:pPr>
-            <a:r>
-              <a:rPr lang="en-US" sz="1800" b="1" dirty="0">
-                <a:solidFill>
-                  <a:srgbClr val="E07A5F"/>
-                </a:solidFill>
-                <a:latin typeface="Georgia" pitchFamily="34" charset="0"/>
-                <a:ea typeface="Georgia" pitchFamily="34" charset="-122"/>
-                <a:cs typeface="Georgia" pitchFamily="34" charset="-120"/>
-              </a:rPr>
-              <a:t>Goal</a:t>
-            </a:r>
-            <a:endParaRPr lang="en-US" sz="1800" dirty="0"/>
-          </a:p>
-        </p:txBody>
-      </p:sp>
-      <p:sp>
-        <p:nvSpPr>
-          <p:cNvPr id="6" name="Text 4"/>
-          <p:cNvSpPr/>
-          <p:nvPr/>
-        </p:nvSpPr>
-        <p:spPr>
-          <a:xfrm>
-            <a:off x="406301" y="1637854"/>
-            <a:ext cx="8498026" cy="213271"/>
-          </a:xfrm>
-          <a:prstGeom prst="rect">
-            <a:avLst/>
-          </a:prstGeom>
-          <a:noFill/>
-          <a:ln/>
-        </p:spPr>
-        <p:txBody>
-          <a:bodyPr wrap="square" lIns="0" tIns="0" rIns="0" bIns="0" rtlCol="0" anchor="t"/>
-          <a:lstStyle/>
-          <a:p>
-            <a:pPr algn="l" indent="0" marL="0">
-              <a:lnSpc>
-                <a:spcPts val="1680"/>
-              </a:lnSpc>
-              <a:spcBef>
-                <a:spcPts val="300"/>
-              </a:spcBef>
-              <a:spcAft>
-                <a:spcPts val="300"/>
-              </a:spcAft>
-              <a:buNone/>
-            </a:pPr>
-            <a:r>
-              <a:rPr lang="en-US" sz="1200" dirty="0">
-                <a:solidFill>
-                  <a:srgbClr val="2C2C2C"/>
-                </a:solidFill>
-                <a:latin typeface="Verdana" pitchFamily="34" charset="0"/>
-                <a:ea typeface="Verdana" pitchFamily="34" charset="-122"/>
-                <a:cs typeface="Verdana" pitchFamily="34" charset="-120"/>
-              </a:rPr>
-              <a:t>Children commit the 9 deficit-from-10 pairs to memory and can recall any twin in under 1 second.</a:t>
-            </a:r>
-            <a:endParaRPr lang="en-US" sz="1200" dirty="0"/>
-          </a:p>
-        </p:txBody>
-      </p:sp>
-      <p:sp>
-        <p:nvSpPr>
-          <p:cNvPr id="7" name="Text 5"/>
-          <p:cNvSpPr/>
-          <p:nvPr/>
-        </p:nvSpPr>
-        <p:spPr>
-          <a:xfrm>
             <a:off x="406301" y="4434929"/>
             <a:ext cx="8498026" cy="213271"/>
           </a:xfrm>
@@ -2205,7 +2376,7 @@
                 <a:ea typeface="Georgia" pitchFamily="34" charset="-122"/>
                 <a:cs typeface="Georgia" pitchFamily="34" charset="-120"/>
               </a:rPr>
-              <a:t>Differentiation</a:t>
+              <a:t>Card sort (7 min)</a:t>
             </a:r>
             <a:endParaRPr lang="en-US" sz="1800" dirty="0"/>
           </a:p>
@@ -2220,7 +2391,7 @@
         <p:spPr>
           <a:xfrm>
             <a:off x="634901" y="883593"/>
-            <a:ext cx="8102798" cy="525661"/>
+            <a:ext cx="8102798" cy="769441"/>
           </a:xfrm>
           <a:prstGeom prst="rect">
             <a:avLst/>
@@ -2243,7 +2414,7 @@
               <a:buChar char="•"/>
             </a:pPr>
             <a:r>
-              <a:rPr lang="en-US" sz="1200" b="1" dirty="0">
+              <a:rPr lang="en-US" sz="1200" dirty="0">
                 <a:solidFill>
                   <a:srgbClr val="2C2C2C"/>
                 </a:solidFill>
@@ -2251,16 +2422,20 @@
                 <a:ea typeface="Verdana" pitchFamily="34" charset="-122"/>
                 <a:cs typeface="Verdana" pitchFamily="34" charset="-120"/>
               </a:rPr>
-              <a:t>Tier up:</a:t>
-            </a:r>
-            <a:pPr algn="l" indent="0" marL="0">
+              <a:t>Each child gets index cards 1–9.</a:t>
+            </a:r>
+            <a:endParaRPr lang="en-US" sz="1200" dirty="0"/>
+          </a:p>
+          <a:p>
+            <a:pPr algn="l" marL="342900" indent="-342900">
               <a:lnSpc>
                 <a:spcPts val="1620"/>
               </a:lnSpc>
               <a:spcAft>
                 <a:spcPts val="300"/>
               </a:spcAft>
-              <a:buNone/>
+              <a:buSzPct val="100000"/>
+              <a:buChar char="•"/>
             </a:pPr>
             <a:r>
               <a:rPr lang="en-US" sz="1200" dirty="0">
@@ -2271,7 +2446,7 @@
                 <a:ea typeface="Verdana" pitchFamily="34" charset="-122"/>
                 <a:cs typeface="Verdana" pitchFamily="34" charset="-120"/>
               </a:rPr>
-              <a:t> Speed of 30 twins in 30 seconds.</a:t>
+              <a:t>On "Go," they arrange the cards into 5 pairs (with 5's pair being itself or stand-alone).</a:t>
             </a:r>
             <a:endParaRPr lang="en-US" sz="1200" dirty="0"/>
           </a:p>
@@ -2287,7 +2462,7 @@
               <a:buChar char="•"/>
             </a:pPr>
             <a:r>
-              <a:rPr lang="en-US" sz="1200" b="1" dirty="0">
+              <a:rPr lang="en-US" sz="1200" dirty="0">
                 <a:solidFill>
                   <a:srgbClr val="2C2C2C"/>
                 </a:solidFill>
@@ -2295,27 +2470,7 @@
                 <a:ea typeface="Verdana" pitchFamily="34" charset="-122"/>
                 <a:cs typeface="Verdana" pitchFamily="34" charset="-120"/>
               </a:rPr>
-              <a:t>Tier down:</a:t>
-            </a:r>
-            <a:pPr algn="l" indent="0" marL="0">
-              <a:lnSpc>
-                <a:spcPts val="1620"/>
-              </a:lnSpc>
-              <a:spcAft>
-                <a:spcPts val="300"/>
-              </a:spcAft>
-              <a:buNone/>
-            </a:pPr>
-            <a:r>
-              <a:rPr lang="en-US" sz="1200" dirty="0">
-                <a:solidFill>
-                  <a:srgbClr val="2C2C2C"/>
-                </a:solidFill>
-                <a:latin typeface="Verdana" pitchFamily="34" charset="0"/>
-                <a:ea typeface="Verdana" pitchFamily="34" charset="-122"/>
-                <a:cs typeface="Verdana" pitchFamily="34" charset="-120"/>
-              </a:rPr>
-              <a:t> Slow chant. 5 twins in 30 seconds is fine for today.</a:t>
+              <a:t>Fastest 3 children share their arrangement on the floor.</a:t>
             </a:r>
             <a:endParaRPr lang="en-US" sz="1200" dirty="0"/>
           </a:p>
@@ -2473,7 +2628,7 @@
                 <a:ea typeface="Georgia" pitchFamily="34" charset="-122"/>
                 <a:cs typeface="Georgia" pitchFamily="34" charset="-120"/>
               </a:rPr>
-              <a:t>Teacher's quick notes</a:t>
+              <a:t>Show + chant (3 min)</a:t>
             </a:r>
             <a:endParaRPr lang="en-US" sz="1800" dirty="0"/>
           </a:p>
@@ -2487,8 +2642,8 @@
         </p:nvSpPr>
         <p:spPr>
           <a:xfrm>
-            <a:off x="406301" y="870942"/>
-            <a:ext cx="8498026" cy="639812"/>
+            <a:off x="634901" y="883593"/>
+            <a:ext cx="8102798" cy="281880"/>
           </a:xfrm>
           <a:prstGeom prst="rect">
             <a:avLst/>
@@ -2500,17 +2655,15 @@
           <a:bodyPr wrap="square" lIns="0" tIns="0" rIns="0" bIns="0" rtlCol="0" anchor="t"/>
           <a:lstStyle/>
           <a:p>
-            <a:pPr algn="l" indent="0" marL="0">
-              <a:lnSpc>
-                <a:spcPts val="1680"/>
-              </a:lnSpc>
-              <a:spcBef>
-                <a:spcPts val="300"/>
-              </a:spcBef>
+            <a:pPr algn="l" marL="342900" indent="-342900">
+              <a:lnSpc>
+                <a:spcPts val="1620"/>
+              </a:lnSpc>
               <a:spcAft>
                 <a:spcPts val="300"/>
               </a:spcAft>
-              <a:buNone/>
+              <a:buSzPct val="100000"/>
+              <a:buChar char="•"/>
             </a:pPr>
             <a:r>
               <a:rPr lang="en-US" sz="1200" dirty="0">
@@ -2521,7 +2674,707 @@
                 <a:ea typeface="Verdana" pitchFamily="34" charset="-122"/>
                 <a:cs typeface="Verdana" pitchFamily="34" charset="-120"/>
               </a:rPr>
-              <a:t>– Pay attention to children who PAUSE before answering. They haven't built the reflex yet. Pull them into more drills tomorrow. – The single most important fluency in this module. Don't move on if half the class is still pausing.</a:t>
+              <a:t>Final chant. Pull the index cards back into the deck.</a:t>
+            </a:r>
+            <a:endParaRPr lang="en-US" sz="1200" dirty="0"/>
+          </a:p>
+        </p:txBody>
+      </p:sp>
+      <p:sp>
+        <p:nvSpPr>
+          <p:cNvPr id="5" name="Text 3"/>
+          <p:cNvSpPr/>
+          <p:nvPr/>
+        </p:nvSpPr>
+        <p:spPr>
+          <a:xfrm>
+            <a:off x="406301" y="4434929"/>
+            <a:ext cx="8498026" cy="213271"/>
+          </a:xfrm>
+          <a:prstGeom prst="rect">
+            <a:avLst/>
+          </a:prstGeom>
+          <a:noFill/>
+          <a:ln/>
+        </p:spPr>
+        <p:txBody>
+          <a:bodyPr wrap="square" lIns="0" tIns="0" rIns="0" bIns="0" rtlCol="0" anchor="t"/>
+          <a:lstStyle/>
+          <a:p>
+            <a:pPr algn="l" indent="0" marL="0">
+              <a:lnSpc>
+                <a:spcPts val="1680"/>
+              </a:lnSpc>
+              <a:spcBef>
+                <a:spcPts val="300"/>
+              </a:spcBef>
+              <a:spcAft>
+                <a:spcPts val="300"/>
+              </a:spcAft>
+              <a:buNone/>
+            </a:pPr>
+            <a:r>
+              <a:rPr lang="en-US" sz="1200" dirty="0">
+                <a:solidFill>
+                  <a:srgbClr val="2C2C2C"/>
+                </a:solidFill>
+                <a:latin typeface="Verdana" pitchFamily="34" charset="0"/>
+                <a:ea typeface="Verdana" pitchFamily="34" charset="-122"/>
+                <a:cs typeface="Verdana" pitchFamily="34" charset="-120"/>
+              </a:rPr>
+              <a:t>Primary ·  · IKS Curriculum</a:t>
+            </a:r>
+            <a:endParaRPr lang="en-US" sz="1200" dirty="0"/>
+          </a:p>
+        </p:txBody>
+      </p:sp>
+    </p:spTree>
+  </p:cSld>
+  <p:clrMapOvr>
+    <a:masterClrMapping/>
+  </p:clrMapOvr>
+</p:sld>
+</file>
+
+<file path=ppt/slides/slide12.xml><?xml version="1.0" encoding="utf-8"?>
+<p:sld xmlns:a="http://schemas.openxmlformats.org/drawingml/2006/main" xmlns:r="http://schemas.openxmlformats.org/officeDocument/2006/relationships" xmlns:p="http://schemas.openxmlformats.org/presentationml/2006/main">
+  <p:cSld name="Slide 12">
+    <p:bg>
+      <p:bgPr>
+        <a:solidFill>
+          <a:srgbClr val="FAF7F2"/>
+        </a:solidFill>
+      </p:bgPr>
+    </p:bg>
+    <p:spTree>
+      <p:nvGrpSpPr>
+        <p:cNvPr id="1" name=""/>
+        <p:cNvGrpSpPr/>
+        <p:nvPr/>
+      </p:nvGrpSpPr>
+      <p:grpSpPr>
+        <a:xfrm>
+          <a:off x="0" y="0"/>
+          <a:ext cx="0" cy="0"/>
+          <a:chOff x="0" y="0"/>
+          <a:chExt cx="0" cy="0"/>
+        </a:xfrm>
+      </p:grpSpPr>
+      <p:sp>
+        <p:nvSpPr>
+          <p:cNvPr id="2" name="Text 0"/>
+          <p:cNvSpPr/>
+          <p:nvPr/>
+        </p:nvSpPr>
+        <p:spPr>
+          <a:xfrm>
+            <a:off x="0" y="0"/>
+            <a:ext cx="9144000" cy="101501"/>
+          </a:xfrm>
+          <a:prstGeom prst="rect">
+            <a:avLst/>
+          </a:prstGeom>
+          <a:solidFill>
+            <a:srgbClr val="87A96B"/>
+          </a:solidFill>
+          <a:ln/>
+        </p:spPr>
+        <p:txBody>
+          <a:bodyPr wrap="square" rtlCol="0" anchor="ctr"/>
+          <a:lstStyle/>
+          <a:p>
+            <a:pPr indent="0" marL="0">
+              <a:buNone/>
+            </a:pPr>
+            <a:endParaRPr lang="en-US" dirty="0"/>
+          </a:p>
+        </p:txBody>
+      </p:sp>
+      <p:sp>
+        <p:nvSpPr>
+          <p:cNvPr id="3" name="Text 1"/>
+          <p:cNvSpPr/>
+          <p:nvPr/>
+        </p:nvSpPr>
+        <p:spPr>
+          <a:xfrm>
+            <a:off x="406301" y="457051"/>
+            <a:ext cx="8498026" cy="274290"/>
+          </a:xfrm>
+          <a:prstGeom prst="rect">
+            <a:avLst/>
+          </a:prstGeom>
+          <a:noFill/>
+          <a:ln/>
+        </p:spPr>
+        <p:txBody>
+          <a:bodyPr wrap="square" lIns="0" tIns="0" rIns="0" bIns="0" rtlCol="0" anchor="t"/>
+          <a:lstStyle/>
+          <a:p>
+            <a:pPr algn="l" indent="0" marL="0">
+              <a:lnSpc>
+                <a:spcPts val="2160"/>
+              </a:lnSpc>
+              <a:spcBef>
+                <a:spcPts val="600"/>
+              </a:spcBef>
+              <a:spcAft>
+                <a:spcPts val="800"/>
+              </a:spcAft>
+              <a:buNone/>
+            </a:pPr>
+            <a:r>
+              <a:rPr lang="en-US" sz="1800" b="1" dirty="0">
+                <a:solidFill>
+                  <a:srgbClr val="E07A5F"/>
+                </a:solidFill>
+                <a:latin typeface="Georgia" pitchFamily="34" charset="0"/>
+                <a:ea typeface="Georgia" pitchFamily="34" charset="-122"/>
+                <a:cs typeface="Georgia" pitchFamily="34" charset="-120"/>
+              </a:rPr>
+              <a:t>Homework</a:t>
+            </a:r>
+            <a:endParaRPr lang="en-US" sz="1800" dirty="0"/>
+          </a:p>
+        </p:txBody>
+      </p:sp>
+      <p:sp>
+        <p:nvSpPr>
+          <p:cNvPr id="4" name="Text 2"/>
+          <p:cNvSpPr/>
+          <p:nvPr/>
+        </p:nvSpPr>
+        <p:spPr>
+          <a:xfrm>
+            <a:off x="634901" y="883593"/>
+            <a:ext cx="8102798" cy="281880"/>
+          </a:xfrm>
+          <a:prstGeom prst="rect">
+            <a:avLst/>
+          </a:prstGeom>
+          <a:noFill/>
+          <a:ln/>
+        </p:spPr>
+        <p:txBody>
+          <a:bodyPr wrap="square" lIns="0" tIns="0" rIns="0" bIns="0" rtlCol="0" anchor="t"/>
+          <a:lstStyle/>
+          <a:p>
+            <a:pPr algn="l" marL="342900" indent="-342900">
+              <a:lnSpc>
+                <a:spcPts val="1620"/>
+              </a:lnSpc>
+              <a:spcAft>
+                <a:spcPts val="300"/>
+              </a:spcAft>
+              <a:buSzPct val="100000"/>
+              <a:buChar char="•"/>
+            </a:pPr>
+            <a:r>
+              <a:rPr lang="en-US" sz="1200" dirty="0">
+                <a:solidFill>
+                  <a:srgbClr val="2C2C2C"/>
+                </a:solidFill>
+                <a:latin typeface="Verdana" pitchFamily="34" charset="0"/>
+                <a:ea typeface="Verdana" pitchFamily="34" charset="-122"/>
+                <a:cs typeface="Verdana" pitchFamily="34" charset="-120"/>
+              </a:rPr>
+              <a:t>At home, have someone call out 10 digits in 30 seconds. You say the twin. Beat 8/10.</a:t>
+            </a:r>
+            <a:endParaRPr lang="en-US" sz="1200" dirty="0"/>
+          </a:p>
+        </p:txBody>
+      </p:sp>
+      <p:sp>
+        <p:nvSpPr>
+          <p:cNvPr id="5" name="Text 3"/>
+          <p:cNvSpPr/>
+          <p:nvPr/>
+        </p:nvSpPr>
+        <p:spPr>
+          <a:xfrm>
+            <a:off x="406301" y="4434929"/>
+            <a:ext cx="8498026" cy="213271"/>
+          </a:xfrm>
+          <a:prstGeom prst="rect">
+            <a:avLst/>
+          </a:prstGeom>
+          <a:noFill/>
+          <a:ln/>
+        </p:spPr>
+        <p:txBody>
+          <a:bodyPr wrap="square" lIns="0" tIns="0" rIns="0" bIns="0" rtlCol="0" anchor="t"/>
+          <a:lstStyle/>
+          <a:p>
+            <a:pPr algn="l" indent="0" marL="0">
+              <a:lnSpc>
+                <a:spcPts val="1680"/>
+              </a:lnSpc>
+              <a:spcBef>
+                <a:spcPts val="300"/>
+              </a:spcBef>
+              <a:spcAft>
+                <a:spcPts val="300"/>
+              </a:spcAft>
+              <a:buNone/>
+            </a:pPr>
+            <a:r>
+              <a:rPr lang="en-US" sz="1200" dirty="0">
+                <a:solidFill>
+                  <a:srgbClr val="2C2C2C"/>
+                </a:solidFill>
+                <a:latin typeface="Verdana" pitchFamily="34" charset="0"/>
+                <a:ea typeface="Verdana" pitchFamily="34" charset="-122"/>
+                <a:cs typeface="Verdana" pitchFamily="34" charset="-120"/>
+              </a:rPr>
+              <a:t>Primary ·  · IKS Curriculum</a:t>
+            </a:r>
+            <a:endParaRPr lang="en-US" sz="1200" dirty="0"/>
+          </a:p>
+        </p:txBody>
+      </p:sp>
+    </p:spTree>
+  </p:cSld>
+  <p:clrMapOvr>
+    <a:masterClrMapping/>
+  </p:clrMapOvr>
+</p:sld>
+</file>
+
+<file path=ppt/slides/slide13.xml><?xml version="1.0" encoding="utf-8"?>
+<p:sld xmlns:a="http://schemas.openxmlformats.org/drawingml/2006/main" xmlns:r="http://schemas.openxmlformats.org/officeDocument/2006/relationships" xmlns:p="http://schemas.openxmlformats.org/presentationml/2006/main">
+  <p:cSld name="Slide 13">
+    <p:bg>
+      <p:bgPr>
+        <a:solidFill>
+          <a:srgbClr val="FAF7F2"/>
+        </a:solidFill>
+      </p:bgPr>
+    </p:bg>
+    <p:spTree>
+      <p:nvGrpSpPr>
+        <p:cNvPr id="1" name=""/>
+        <p:cNvGrpSpPr/>
+        <p:nvPr/>
+      </p:nvGrpSpPr>
+      <p:grpSpPr>
+        <a:xfrm>
+          <a:off x="0" y="0"/>
+          <a:ext cx="0" cy="0"/>
+          <a:chOff x="0" y="0"/>
+          <a:chExt cx="0" cy="0"/>
+        </a:xfrm>
+      </p:grpSpPr>
+      <p:sp>
+        <p:nvSpPr>
+          <p:cNvPr id="2" name="Text 0"/>
+          <p:cNvSpPr/>
+          <p:nvPr/>
+        </p:nvSpPr>
+        <p:spPr>
+          <a:xfrm>
+            <a:off x="0" y="0"/>
+            <a:ext cx="9144000" cy="101501"/>
+          </a:xfrm>
+          <a:prstGeom prst="rect">
+            <a:avLst/>
+          </a:prstGeom>
+          <a:solidFill>
+            <a:srgbClr val="87A96B"/>
+          </a:solidFill>
+          <a:ln/>
+        </p:spPr>
+        <p:txBody>
+          <a:bodyPr wrap="square" rtlCol="0" anchor="ctr"/>
+          <a:lstStyle/>
+          <a:p>
+            <a:pPr indent="0" marL="0">
+              <a:buNone/>
+            </a:pPr>
+            <a:endParaRPr lang="en-US" dirty="0"/>
+          </a:p>
+        </p:txBody>
+      </p:sp>
+      <p:sp>
+        <p:nvSpPr>
+          <p:cNvPr id="3" name="Text 1"/>
+          <p:cNvSpPr/>
+          <p:nvPr/>
+        </p:nvSpPr>
+        <p:spPr>
+          <a:xfrm>
+            <a:off x="406301" y="457051"/>
+            <a:ext cx="8498026" cy="274290"/>
+          </a:xfrm>
+          <a:prstGeom prst="rect">
+            <a:avLst/>
+          </a:prstGeom>
+          <a:noFill/>
+          <a:ln/>
+        </p:spPr>
+        <p:txBody>
+          <a:bodyPr wrap="square" lIns="0" tIns="0" rIns="0" bIns="0" rtlCol="0" anchor="t"/>
+          <a:lstStyle/>
+          <a:p>
+            <a:pPr algn="l" indent="0" marL="0">
+              <a:lnSpc>
+                <a:spcPts val="2160"/>
+              </a:lnSpc>
+              <a:spcBef>
+                <a:spcPts val="600"/>
+              </a:spcBef>
+              <a:spcAft>
+                <a:spcPts val="800"/>
+              </a:spcAft>
+              <a:buNone/>
+            </a:pPr>
+            <a:r>
+              <a:rPr lang="en-US" sz="1800" b="1" dirty="0">
+                <a:solidFill>
+                  <a:srgbClr val="E07A5F"/>
+                </a:solidFill>
+                <a:latin typeface="Georgia" pitchFamily="34" charset="0"/>
+                <a:ea typeface="Georgia" pitchFamily="34" charset="-122"/>
+                <a:cs typeface="Georgia" pitchFamily="34" charset="-120"/>
+              </a:rPr>
+              <a:t>Differentiation</a:t>
+            </a:r>
+            <a:endParaRPr lang="en-US" sz="1800" dirty="0"/>
+          </a:p>
+        </p:txBody>
+      </p:sp>
+      <p:sp>
+        <p:nvSpPr>
+          <p:cNvPr id="4" name="Text 2"/>
+          <p:cNvSpPr/>
+          <p:nvPr/>
+        </p:nvSpPr>
+        <p:spPr>
+          <a:xfrm>
+            <a:off x="634901" y="883593"/>
+            <a:ext cx="8102798" cy="525661"/>
+          </a:xfrm>
+          <a:prstGeom prst="rect">
+            <a:avLst/>
+          </a:prstGeom>
+          <a:noFill/>
+          <a:ln/>
+        </p:spPr>
+        <p:txBody>
+          <a:bodyPr wrap="square" lIns="0" tIns="0" rIns="0" bIns="0" rtlCol="0" anchor="t"/>
+          <a:lstStyle/>
+          <a:p>
+            <a:pPr algn="l" marL="342900" indent="-342900">
+              <a:lnSpc>
+                <a:spcPts val="1620"/>
+              </a:lnSpc>
+              <a:spcAft>
+                <a:spcPts val="300"/>
+              </a:spcAft>
+              <a:buSzPct val="100000"/>
+              <a:buChar char="•"/>
+            </a:pPr>
+            <a:r>
+              <a:rPr lang="en-US" sz="1200" b="1" dirty="0">
+                <a:solidFill>
+                  <a:srgbClr val="2C2C2C"/>
+                </a:solidFill>
+                <a:latin typeface="Verdana" pitchFamily="34" charset="0"/>
+                <a:ea typeface="Verdana" pitchFamily="34" charset="-122"/>
+                <a:cs typeface="Verdana" pitchFamily="34" charset="-120"/>
+              </a:rPr>
+              <a:t>Tier up:</a:t>
+            </a:r>
+            <a:pPr algn="l" indent="0" marL="0">
+              <a:lnSpc>
+                <a:spcPts val="1620"/>
+              </a:lnSpc>
+              <a:spcAft>
+                <a:spcPts val="300"/>
+              </a:spcAft>
+              <a:buNone/>
+            </a:pPr>
+            <a:r>
+              <a:rPr lang="en-US" sz="1200" dirty="0">
+                <a:solidFill>
+                  <a:srgbClr val="2C2C2C"/>
+                </a:solidFill>
+                <a:latin typeface="Verdana" pitchFamily="34" charset="0"/>
+                <a:ea typeface="Verdana" pitchFamily="34" charset="-122"/>
+                <a:cs typeface="Verdana" pitchFamily="34" charset="-120"/>
+              </a:rPr>
+              <a:t> Speed of 30 twins in 30 seconds.</a:t>
+            </a:r>
+            <a:endParaRPr lang="en-US" sz="1200" dirty="0"/>
+          </a:p>
+          <a:p>
+            <a:pPr algn="l" marL="342900" indent="-342900">
+              <a:lnSpc>
+                <a:spcPts val="1620"/>
+              </a:lnSpc>
+              <a:spcAft>
+                <a:spcPts val="300"/>
+              </a:spcAft>
+              <a:buSzPct val="100000"/>
+              <a:buChar char="•"/>
+            </a:pPr>
+            <a:r>
+              <a:rPr lang="en-US" sz="1200" b="1" dirty="0">
+                <a:solidFill>
+                  <a:srgbClr val="2C2C2C"/>
+                </a:solidFill>
+                <a:latin typeface="Verdana" pitchFamily="34" charset="0"/>
+                <a:ea typeface="Verdana" pitchFamily="34" charset="-122"/>
+                <a:cs typeface="Verdana" pitchFamily="34" charset="-120"/>
+              </a:rPr>
+              <a:t>Tier down:</a:t>
+            </a:r>
+            <a:pPr algn="l" indent="0" marL="0">
+              <a:lnSpc>
+                <a:spcPts val="1620"/>
+              </a:lnSpc>
+              <a:spcAft>
+                <a:spcPts val="300"/>
+              </a:spcAft>
+              <a:buNone/>
+            </a:pPr>
+            <a:r>
+              <a:rPr lang="en-US" sz="1200" dirty="0">
+                <a:solidFill>
+                  <a:srgbClr val="2C2C2C"/>
+                </a:solidFill>
+                <a:latin typeface="Verdana" pitchFamily="34" charset="0"/>
+                <a:ea typeface="Verdana" pitchFamily="34" charset="-122"/>
+                <a:cs typeface="Verdana" pitchFamily="34" charset="-120"/>
+              </a:rPr>
+              <a:t> Slow chant. 5 twins in 30 seconds is fine for today.</a:t>
+            </a:r>
+            <a:endParaRPr lang="en-US" sz="1200" dirty="0"/>
+          </a:p>
+        </p:txBody>
+      </p:sp>
+      <p:sp>
+        <p:nvSpPr>
+          <p:cNvPr id="5" name="Text 3"/>
+          <p:cNvSpPr/>
+          <p:nvPr/>
+        </p:nvSpPr>
+        <p:spPr>
+          <a:xfrm>
+            <a:off x="406301" y="4434929"/>
+            <a:ext cx="8498026" cy="213271"/>
+          </a:xfrm>
+          <a:prstGeom prst="rect">
+            <a:avLst/>
+          </a:prstGeom>
+          <a:noFill/>
+          <a:ln/>
+        </p:spPr>
+        <p:txBody>
+          <a:bodyPr wrap="square" lIns="0" tIns="0" rIns="0" bIns="0" rtlCol="0" anchor="t"/>
+          <a:lstStyle/>
+          <a:p>
+            <a:pPr algn="l" indent="0" marL="0">
+              <a:lnSpc>
+                <a:spcPts val="1680"/>
+              </a:lnSpc>
+              <a:spcBef>
+                <a:spcPts val="300"/>
+              </a:spcBef>
+              <a:spcAft>
+                <a:spcPts val="300"/>
+              </a:spcAft>
+              <a:buNone/>
+            </a:pPr>
+            <a:r>
+              <a:rPr lang="en-US" sz="1200" dirty="0">
+                <a:solidFill>
+                  <a:srgbClr val="2C2C2C"/>
+                </a:solidFill>
+                <a:latin typeface="Verdana" pitchFamily="34" charset="0"/>
+                <a:ea typeface="Verdana" pitchFamily="34" charset="-122"/>
+                <a:cs typeface="Verdana" pitchFamily="34" charset="-120"/>
+              </a:rPr>
+              <a:t>Primary ·  · IKS Curriculum</a:t>
+            </a:r>
+            <a:endParaRPr lang="en-US" sz="1200" dirty="0"/>
+          </a:p>
+        </p:txBody>
+      </p:sp>
+    </p:spTree>
+  </p:cSld>
+  <p:clrMapOvr>
+    <a:masterClrMapping/>
+  </p:clrMapOvr>
+</p:sld>
+</file>
+
+<file path=ppt/slides/slide14.xml><?xml version="1.0" encoding="utf-8"?>
+<p:sld xmlns:a="http://schemas.openxmlformats.org/drawingml/2006/main" xmlns:r="http://schemas.openxmlformats.org/officeDocument/2006/relationships" xmlns:p="http://schemas.openxmlformats.org/presentationml/2006/main">
+  <p:cSld name="Slide 14">
+    <p:bg>
+      <p:bgPr>
+        <a:solidFill>
+          <a:srgbClr val="FAF7F2"/>
+        </a:solidFill>
+      </p:bgPr>
+    </p:bg>
+    <p:spTree>
+      <p:nvGrpSpPr>
+        <p:cNvPr id="1" name=""/>
+        <p:cNvGrpSpPr/>
+        <p:nvPr/>
+      </p:nvGrpSpPr>
+      <p:grpSpPr>
+        <a:xfrm>
+          <a:off x="0" y="0"/>
+          <a:ext cx="0" cy="0"/>
+          <a:chOff x="0" y="0"/>
+          <a:chExt cx="0" cy="0"/>
+        </a:xfrm>
+      </p:grpSpPr>
+      <p:sp>
+        <p:nvSpPr>
+          <p:cNvPr id="2" name="Text 0"/>
+          <p:cNvSpPr/>
+          <p:nvPr/>
+        </p:nvSpPr>
+        <p:spPr>
+          <a:xfrm>
+            <a:off x="0" y="0"/>
+            <a:ext cx="9144000" cy="101501"/>
+          </a:xfrm>
+          <a:prstGeom prst="rect">
+            <a:avLst/>
+          </a:prstGeom>
+          <a:solidFill>
+            <a:srgbClr val="87A96B"/>
+          </a:solidFill>
+          <a:ln/>
+        </p:spPr>
+        <p:txBody>
+          <a:bodyPr wrap="square" rtlCol="0" anchor="ctr"/>
+          <a:lstStyle/>
+          <a:p>
+            <a:pPr indent="0" marL="0">
+              <a:buNone/>
+            </a:pPr>
+            <a:endParaRPr lang="en-US" dirty="0"/>
+          </a:p>
+        </p:txBody>
+      </p:sp>
+      <p:sp>
+        <p:nvSpPr>
+          <p:cNvPr id="3" name="Text 1"/>
+          <p:cNvSpPr/>
+          <p:nvPr/>
+        </p:nvSpPr>
+        <p:spPr>
+          <a:xfrm>
+            <a:off x="406301" y="457051"/>
+            <a:ext cx="8498026" cy="274290"/>
+          </a:xfrm>
+          <a:prstGeom prst="rect">
+            <a:avLst/>
+          </a:prstGeom>
+          <a:noFill/>
+          <a:ln/>
+        </p:spPr>
+        <p:txBody>
+          <a:bodyPr wrap="square" lIns="0" tIns="0" rIns="0" bIns="0" rtlCol="0" anchor="t"/>
+          <a:lstStyle/>
+          <a:p>
+            <a:pPr algn="l" indent="0" marL="0">
+              <a:lnSpc>
+                <a:spcPts val="2160"/>
+              </a:lnSpc>
+              <a:spcBef>
+                <a:spcPts val="600"/>
+              </a:spcBef>
+              <a:spcAft>
+                <a:spcPts val="800"/>
+              </a:spcAft>
+              <a:buNone/>
+            </a:pPr>
+            <a:r>
+              <a:rPr lang="en-US" sz="1800" b="1" dirty="0">
+                <a:solidFill>
+                  <a:srgbClr val="E07A5F"/>
+                </a:solidFill>
+                <a:latin typeface="Georgia" pitchFamily="34" charset="0"/>
+                <a:ea typeface="Georgia" pitchFamily="34" charset="-122"/>
+                <a:cs typeface="Georgia" pitchFamily="34" charset="-120"/>
+              </a:rPr>
+              <a:t>Teacher's quick notes</a:t>
+            </a:r>
+            <a:endParaRPr lang="en-US" sz="1800" dirty="0"/>
+          </a:p>
+        </p:txBody>
+      </p:sp>
+      <p:sp>
+        <p:nvSpPr>
+          <p:cNvPr id="4" name="Text 2"/>
+          <p:cNvSpPr/>
+          <p:nvPr/>
+        </p:nvSpPr>
+        <p:spPr>
+          <a:xfrm>
+            <a:off x="634901" y="883593"/>
+            <a:ext cx="8102798" cy="731341"/>
+          </a:xfrm>
+          <a:prstGeom prst="rect">
+            <a:avLst/>
+          </a:prstGeom>
+          <a:noFill/>
+          <a:ln/>
+        </p:spPr>
+        <p:txBody>
+          <a:bodyPr wrap="square" lIns="0" tIns="0" rIns="0" bIns="0" rtlCol="0" anchor="t"/>
+          <a:lstStyle/>
+          <a:p>
+            <a:pPr algn="l" marL="342900" indent="-342900">
+              <a:lnSpc>
+                <a:spcPts val="1620"/>
+              </a:lnSpc>
+              <a:spcAft>
+                <a:spcPts val="300"/>
+              </a:spcAft>
+              <a:buSzPct val="100000"/>
+              <a:buChar char="•"/>
+            </a:pPr>
+            <a:r>
+              <a:rPr lang="en-US" sz="1200" dirty="0">
+                <a:solidFill>
+                  <a:srgbClr val="2C2C2C"/>
+                </a:solidFill>
+                <a:latin typeface="Verdana" pitchFamily="34" charset="0"/>
+                <a:ea typeface="Verdana" pitchFamily="34" charset="-122"/>
+                <a:cs typeface="Verdana" pitchFamily="34" charset="-120"/>
+              </a:rPr>
+              <a:t>Pay attention to children who PAUSE before answering. They haven't built the reflex yet. Pull them into more drills tomorrow.</a:t>
+            </a:r>
+            <a:endParaRPr lang="en-US" sz="1200" dirty="0"/>
+          </a:p>
+          <a:p>
+            <a:pPr algn="l" marL="342900" indent="-342900">
+              <a:lnSpc>
+                <a:spcPts val="1620"/>
+              </a:lnSpc>
+              <a:spcAft>
+                <a:spcPts val="300"/>
+              </a:spcAft>
+              <a:buSzPct val="100000"/>
+              <a:buChar char="•"/>
+            </a:pPr>
+            <a:r>
+              <a:rPr lang="en-US" sz="1200" dirty="0">
+                <a:solidFill>
+                  <a:srgbClr val="2C2C2C"/>
+                </a:solidFill>
+                <a:latin typeface="Verdana" pitchFamily="34" charset="0"/>
+                <a:ea typeface="Verdana" pitchFamily="34" charset="-122"/>
+                <a:cs typeface="Verdana" pitchFamily="34" charset="-120"/>
+              </a:rPr>
+              <a:t>The single most important fluency in this module. Don't move on if half the class is still pausing.</a:t>
             </a:r>
             <a:endParaRPr lang="en-US" sz="1200" dirty="0"/>
           </a:p>
@@ -2679,7 +3532,7 @@
                 <a:ea typeface="Georgia" pitchFamily="34" charset="-122"/>
                 <a:cs typeface="Georgia" pitchFamily="34" charset="-120"/>
               </a:rPr>
-              <a:t>Materials</a:t>
+              <a:t>Goal</a:t>
             </a:r>
             <a:endParaRPr lang="en-US" sz="1800" dirty="0"/>
           </a:p>
@@ -2694,7 +3547,7 @@
         <p:spPr>
           <a:xfrm>
             <a:off x="406301" y="870942"/>
-            <a:ext cx="8498026" cy="426541"/>
+            <a:ext cx="8498026" cy="213271"/>
           </a:xfrm>
           <a:prstGeom prst="rect">
             <a:avLst/>
@@ -2727,7 +3580,7 @@
                 <a:ea typeface="Verdana" pitchFamily="34" charset="-122"/>
                 <a:cs typeface="Verdana" pitchFamily="34" charset="-120"/>
               </a:rPr>
-              <a:t>– Class wall-poster: "Twins of 10" (pre-made; show all 9 pairs). – Index cards with single digits 1–9 (one set per child). – Stopwatch.</a:t>
+              <a:t>Children commit the 9 deficit-from-10 pairs to memory and can recall any twin in under 1 second.</a:t>
             </a:r>
             <a:endParaRPr lang="en-US" sz="1200" dirty="0"/>
           </a:p>
@@ -2885,7 +3738,7 @@
                 <a:ea typeface="Georgia" pitchFamily="34" charset="-122"/>
                 <a:cs typeface="Georgia" pitchFamily="34" charset="-120"/>
               </a:rPr>
-              <a:t>The flow</a:t>
+              <a:t>Materials</a:t>
             </a:r>
             <a:endParaRPr lang="en-US" sz="1800" dirty="0"/>
           </a:p>
@@ -2894,6 +3747,100 @@
       <p:sp>
         <p:nvSpPr>
           <p:cNvPr id="4" name="Text 2"/>
+          <p:cNvSpPr/>
+          <p:nvPr/>
+        </p:nvSpPr>
+        <p:spPr>
+          <a:xfrm>
+            <a:off x="634901" y="883593"/>
+            <a:ext cx="8102798" cy="769441"/>
+          </a:xfrm>
+          <a:prstGeom prst="rect">
+            <a:avLst/>
+          </a:prstGeom>
+          <a:noFill/>
+          <a:ln/>
+        </p:spPr>
+        <p:txBody>
+          <a:bodyPr wrap="square" lIns="0" tIns="0" rIns="0" bIns="0" rtlCol="0" anchor="t"/>
+          <a:lstStyle/>
+          <a:p>
+            <a:pPr algn="l" marL="342900" indent="-342900">
+              <a:lnSpc>
+                <a:spcPts val="1620"/>
+              </a:lnSpc>
+              <a:spcAft>
+                <a:spcPts val="300"/>
+              </a:spcAft>
+              <a:buSzPct val="100000"/>
+              <a:buChar char="•"/>
+            </a:pPr>
+            <a:r>
+              <a:rPr lang="en-US" sz="1200" dirty="0">
+                <a:solidFill>
+                  <a:srgbClr val="2C2C2C"/>
+                </a:solidFill>
+                <a:latin typeface="Verdana" pitchFamily="34" charset="0"/>
+                <a:ea typeface="Verdana" pitchFamily="34" charset="-122"/>
+                <a:cs typeface="Verdana" pitchFamily="34" charset="-120"/>
+              </a:rPr>
+              <a:t>Class wall-poster: "Twins of 10" (pre-made; show all 9 pairs).</a:t>
+            </a:r>
+            <a:endParaRPr lang="en-US" sz="1200" dirty="0"/>
+          </a:p>
+          <a:p>
+            <a:pPr algn="l" marL="342900" indent="-342900">
+              <a:lnSpc>
+                <a:spcPts val="1620"/>
+              </a:lnSpc>
+              <a:spcAft>
+                <a:spcPts val="300"/>
+              </a:spcAft>
+              <a:buSzPct val="100000"/>
+              <a:buChar char="•"/>
+            </a:pPr>
+            <a:r>
+              <a:rPr lang="en-US" sz="1200" dirty="0">
+                <a:solidFill>
+                  <a:srgbClr val="2C2C2C"/>
+                </a:solidFill>
+                <a:latin typeface="Verdana" pitchFamily="34" charset="0"/>
+                <a:ea typeface="Verdana" pitchFamily="34" charset="-122"/>
+                <a:cs typeface="Verdana" pitchFamily="34" charset="-120"/>
+              </a:rPr>
+              <a:t>Index cards with single digits 1–9 (one set per child).</a:t>
+            </a:r>
+            <a:endParaRPr lang="en-US" sz="1200" dirty="0"/>
+          </a:p>
+          <a:p>
+            <a:pPr algn="l" marL="342900" indent="-342900">
+              <a:lnSpc>
+                <a:spcPts val="1620"/>
+              </a:lnSpc>
+              <a:spcAft>
+                <a:spcPts val="300"/>
+              </a:spcAft>
+              <a:buSzPct val="100000"/>
+              <a:buChar char="•"/>
+            </a:pPr>
+            <a:r>
+              <a:rPr lang="en-US" sz="1200" dirty="0">
+                <a:solidFill>
+                  <a:srgbClr val="2C2C2C"/>
+                </a:solidFill>
+                <a:latin typeface="Verdana" pitchFamily="34" charset="0"/>
+                <a:ea typeface="Verdana" pitchFamily="34" charset="-122"/>
+                <a:cs typeface="Verdana" pitchFamily="34" charset="-120"/>
+              </a:rPr>
+              <a:t>Stopwatch.</a:t>
+            </a:r>
+            <a:endParaRPr lang="en-US" sz="1200" dirty="0"/>
+          </a:p>
+        </p:txBody>
+      </p:sp>
+      <p:sp>
+        <p:nvSpPr>
+          <p:cNvPr id="5" name="Text 3"/>
           <p:cNvSpPr/>
           <p:nvPr/>
         </p:nvSpPr>
@@ -3043,7 +3990,7 @@
                 <a:ea typeface="Georgia" pitchFamily="34" charset="-122"/>
                 <a:cs typeface="Georgia" pitchFamily="34" charset="-120"/>
               </a:rPr>
-              <a:t>Settle + chant (5 min)</a:t>
+              <a:t>The flow</a:t>
             </a:r>
             <a:endParaRPr lang="en-US" sz="1800" dirty="0"/>
           </a:p>
@@ -3052,352 +3999,6 @@
       <p:sp>
         <p:nvSpPr>
           <p:cNvPr id="4" name="Text 2"/>
-          <p:cNvSpPr/>
-          <p:nvPr/>
-        </p:nvSpPr>
-        <p:spPr>
-          <a:xfrm>
-            <a:off x="406301" y="870942"/>
-            <a:ext cx="8498026" cy="213271"/>
-          </a:xfrm>
-          <a:prstGeom prst="rect">
-            <a:avLst/>
-          </a:prstGeom>
-          <a:noFill/>
-          <a:ln/>
-        </p:spPr>
-        <p:txBody>
-          <a:bodyPr wrap="square" lIns="0" tIns="0" rIns="0" bIns="0" rtlCol="0" anchor="t"/>
-          <a:lstStyle/>
-          <a:p>
-            <a:pPr algn="l" indent="0" marL="0">
-              <a:lnSpc>
-                <a:spcPts val="1680"/>
-              </a:lnSpc>
-              <a:spcBef>
-                <a:spcPts val="300"/>
-              </a:spcBef>
-              <a:spcAft>
-                <a:spcPts val="300"/>
-              </a:spcAft>
-              <a:buNone/>
-            </a:pPr>
-            <a:r>
-              <a:rPr lang="en-US" sz="1200" dirty="0">
-                <a:solidFill>
-                  <a:srgbClr val="2C2C2C"/>
-                </a:solidFill>
-                <a:latin typeface="Verdana" pitchFamily="34" charset="0"/>
-                <a:ea typeface="Verdana" pitchFamily="34" charset="-122"/>
-                <a:cs typeface="Verdana" pitchFamily="34" charset="-120"/>
-              </a:rPr>
-              <a:t>Sing the chant:</a:t>
-            </a:r>
-            <a:endParaRPr lang="en-US" sz="1200" dirty="0"/>
-          </a:p>
-        </p:txBody>
-      </p:sp>
-      <p:sp>
-        <p:nvSpPr>
-          <p:cNvPr id="5" name="Text 3"/>
-          <p:cNvSpPr/>
-          <p:nvPr/>
-        </p:nvSpPr>
-        <p:spPr>
-          <a:xfrm>
-            <a:off x="406301" y="1173063"/>
-            <a:ext cx="8331398" cy="611981"/>
-          </a:xfrm>
-          <a:prstGeom prst="rect">
-            <a:avLst/>
-          </a:prstGeom>
-          <a:solidFill>
-            <a:srgbClr val="FFFFFF"/>
-          </a:solidFill>
-          <a:ln/>
-        </p:spPr>
-        <p:txBody>
-          <a:bodyPr wrap="square" rtlCol="0" anchor="ctr"/>
-          <a:lstStyle/>
-          <a:p>
-            <a:pPr indent="0" marL="0">
-              <a:buNone/>
-            </a:pPr>
-            <a:endParaRPr lang="en-US" dirty="0"/>
-          </a:p>
-        </p:txBody>
-      </p:sp>
-      <p:sp>
-        <p:nvSpPr>
-          <p:cNvPr id="6" name="Shape 4"/>
-          <p:cNvSpPr/>
-          <p:nvPr/>
-        </p:nvSpPr>
-        <p:spPr>
-          <a:xfrm>
-            <a:off x="434876" y="1173063"/>
-            <a:ext cx="0" cy="611981"/>
-          </a:xfrm>
-          <a:prstGeom prst="line">
-            <a:avLst/>
-          </a:prstGeom>
-          <a:noFill/>
-          <a:ln w="57150">
-            <a:solidFill>
-              <a:srgbClr val="E07A5F"/>
-            </a:solidFill>
-            <a:prstDash val="solid"/>
-          </a:ln>
-        </p:spPr>
-      </p:sp>
-      <p:sp>
-        <p:nvSpPr>
-          <p:cNvPr id="7" name="Text 5"/>
-          <p:cNvSpPr/>
-          <p:nvPr/>
-        </p:nvSpPr>
-        <p:spPr>
-          <a:xfrm>
-            <a:off x="692051" y="1363563"/>
-            <a:ext cx="7973389" cy="230981"/>
-          </a:xfrm>
-          <a:prstGeom prst="rect">
-            <a:avLst/>
-          </a:prstGeom>
-          <a:noFill/>
-          <a:ln/>
-        </p:spPr>
-        <p:txBody>
-          <a:bodyPr wrap="square" lIns="0" tIns="0" rIns="0" bIns="0" rtlCol="0" anchor="t"/>
-          <a:lstStyle/>
-          <a:p>
-            <a:pPr algn="l" indent="0" marL="0">
-              <a:lnSpc>
-                <a:spcPts val="1820"/>
-              </a:lnSpc>
-              <a:spcBef>
-                <a:spcPts val="300"/>
-              </a:spcBef>
-              <a:spcAft>
-                <a:spcPts val="300"/>
-              </a:spcAft>
-              <a:buNone/>
-            </a:pPr>
-            <a:r>
-              <a:rPr lang="en-US" sz="1300" i="1" dirty="0">
-                <a:solidFill>
-                  <a:srgbClr val="2C2C2C"/>
-                </a:solidFill>
-                <a:latin typeface="Georgia" pitchFamily="34" charset="0"/>
-                <a:ea typeface="Georgia" pitchFamily="34" charset="-122"/>
-                <a:cs typeface="Georgia" pitchFamily="34" charset="-120"/>
-              </a:rPr>
-              <a:t>"1 and 9 make 10! 2 and 8 make 10! 3 and 7 make 10! 4 and 6 make 10! 5 and 5 make 10!"</a:t>
-            </a:r>
-            <a:endParaRPr lang="en-US" sz="1300" dirty="0"/>
-          </a:p>
-        </p:txBody>
-      </p:sp>
-      <p:sp>
-        <p:nvSpPr>
-          <p:cNvPr id="8" name="Text 6"/>
-          <p:cNvSpPr/>
-          <p:nvPr/>
-        </p:nvSpPr>
-        <p:spPr>
-          <a:xfrm>
-            <a:off x="406301" y="1873895"/>
-            <a:ext cx="8498026" cy="213271"/>
-          </a:xfrm>
-          <a:prstGeom prst="rect">
-            <a:avLst/>
-          </a:prstGeom>
-          <a:noFill/>
-          <a:ln/>
-        </p:spPr>
-        <p:txBody>
-          <a:bodyPr wrap="square" lIns="0" tIns="0" rIns="0" bIns="0" rtlCol="0" anchor="t"/>
-          <a:lstStyle/>
-          <a:p>
-            <a:pPr algn="l" indent="0" marL="0">
-              <a:lnSpc>
-                <a:spcPts val="1680"/>
-              </a:lnSpc>
-              <a:spcBef>
-                <a:spcPts val="300"/>
-              </a:spcBef>
-              <a:spcAft>
-                <a:spcPts val="300"/>
-              </a:spcAft>
-              <a:buNone/>
-            </a:pPr>
-            <a:r>
-              <a:rPr lang="en-US" sz="1200" dirty="0">
-                <a:solidFill>
-                  <a:srgbClr val="2C2C2C"/>
-                </a:solidFill>
-                <a:latin typeface="Verdana" pitchFamily="34" charset="0"/>
-                <a:ea typeface="Verdana" pitchFamily="34" charset="-122"/>
-                <a:cs typeface="Verdana" pitchFamily="34" charset="-120"/>
-              </a:rPr>
-              <a:t>Three times, with claps.</a:t>
-            </a:r>
-            <a:endParaRPr lang="en-US" sz="1200" dirty="0"/>
-          </a:p>
-        </p:txBody>
-      </p:sp>
-      <p:sp>
-        <p:nvSpPr>
-          <p:cNvPr id="9" name="Text 7"/>
-          <p:cNvSpPr/>
-          <p:nvPr/>
-        </p:nvSpPr>
-        <p:spPr>
-          <a:xfrm>
-            <a:off x="406301" y="2163366"/>
-            <a:ext cx="8498026" cy="213271"/>
-          </a:xfrm>
-          <a:prstGeom prst="rect">
-            <a:avLst/>
-          </a:prstGeom>
-          <a:noFill/>
-          <a:ln/>
-        </p:spPr>
-        <p:txBody>
-          <a:bodyPr wrap="square" lIns="0" tIns="0" rIns="0" bIns="0" rtlCol="0" anchor="t"/>
-          <a:lstStyle/>
-          <a:p>
-            <a:pPr algn="l" indent="0" marL="0">
-              <a:lnSpc>
-                <a:spcPts val="1680"/>
-              </a:lnSpc>
-              <a:spcBef>
-                <a:spcPts val="300"/>
-              </a:spcBef>
-              <a:spcAft>
-                <a:spcPts val="300"/>
-              </a:spcAft>
-              <a:buNone/>
-            </a:pPr>
-            <a:r>
-              <a:rPr lang="en-US" sz="1200" dirty="0">
-                <a:solidFill>
-                  <a:srgbClr val="2C2C2C"/>
-                </a:solidFill>
-                <a:latin typeface="Verdana" pitchFamily="34" charset="0"/>
-                <a:ea typeface="Verdana" pitchFamily="34" charset="-122"/>
-                <a:cs typeface="Verdana" pitchFamily="34" charset="-120"/>
-              </a:rPr>
-              <a:t>Now add the "deficit" version (just renaming):</a:t>
-            </a:r>
-            <a:endParaRPr lang="en-US" sz="1200" dirty="0"/>
-          </a:p>
-        </p:txBody>
-      </p:sp>
-      <p:sp>
-        <p:nvSpPr>
-          <p:cNvPr id="10" name="Text 8"/>
-          <p:cNvSpPr/>
-          <p:nvPr/>
-        </p:nvSpPr>
-        <p:spPr>
-          <a:xfrm>
-            <a:off x="406301" y="2465487"/>
-            <a:ext cx="8331398" cy="611981"/>
-          </a:xfrm>
-          <a:prstGeom prst="rect">
-            <a:avLst/>
-          </a:prstGeom>
-          <a:solidFill>
-            <a:srgbClr val="FFFFFF"/>
-          </a:solidFill>
-          <a:ln/>
-        </p:spPr>
-        <p:txBody>
-          <a:bodyPr wrap="square" rtlCol="0" anchor="ctr"/>
-          <a:lstStyle/>
-          <a:p>
-            <a:pPr indent="0" marL="0">
-              <a:buNone/>
-            </a:pPr>
-            <a:endParaRPr lang="en-US" dirty="0"/>
-          </a:p>
-        </p:txBody>
-      </p:sp>
-      <p:sp>
-        <p:nvSpPr>
-          <p:cNvPr id="11" name="Shape 9"/>
-          <p:cNvSpPr/>
-          <p:nvPr/>
-        </p:nvSpPr>
-        <p:spPr>
-          <a:xfrm>
-            <a:off x="434876" y="2465487"/>
-            <a:ext cx="0" cy="611981"/>
-          </a:xfrm>
-          <a:prstGeom prst="line">
-            <a:avLst/>
-          </a:prstGeom>
-          <a:noFill/>
-          <a:ln w="57150">
-            <a:solidFill>
-              <a:srgbClr val="E07A5F"/>
-            </a:solidFill>
-            <a:prstDash val="solid"/>
-          </a:ln>
-        </p:spPr>
-      </p:sp>
-      <p:sp>
-        <p:nvSpPr>
-          <p:cNvPr id="12" name="Text 10"/>
-          <p:cNvSpPr/>
-          <p:nvPr/>
-        </p:nvSpPr>
-        <p:spPr>
-          <a:xfrm>
-            <a:off x="692051" y="2655987"/>
-            <a:ext cx="7973389" cy="230981"/>
-          </a:xfrm>
-          <a:prstGeom prst="rect">
-            <a:avLst/>
-          </a:prstGeom>
-          <a:noFill/>
-          <a:ln/>
-        </p:spPr>
-        <p:txBody>
-          <a:bodyPr wrap="square" lIns="0" tIns="0" rIns="0" bIns="0" rtlCol="0" anchor="t"/>
-          <a:lstStyle/>
-          <a:p>
-            <a:pPr algn="l" indent="0" marL="0">
-              <a:lnSpc>
-                <a:spcPts val="1820"/>
-              </a:lnSpc>
-              <a:spcBef>
-                <a:spcPts val="300"/>
-              </a:spcBef>
-              <a:spcAft>
-                <a:spcPts val="300"/>
-              </a:spcAft>
-              <a:buNone/>
-            </a:pPr>
-            <a:r>
-              <a:rPr lang="en-US" sz="1300" i="1" dirty="0">
-                <a:solidFill>
-                  <a:srgbClr val="2C2C2C"/>
-                </a:solidFill>
-                <a:latin typeface="Georgia" pitchFamily="34" charset="0"/>
-                <a:ea typeface="Georgia" pitchFamily="34" charset="-122"/>
-                <a:cs typeface="Georgia" pitchFamily="34" charset="-120"/>
-              </a:rPr>
-              <a:t>"1's twin is 9! 2's twin is 8! 3's twin is 7! 4's twin is 6! 5's twin is itself!"</a:t>
-            </a:r>
-            <a:endParaRPr lang="en-US" sz="1300" dirty="0"/>
-          </a:p>
-        </p:txBody>
-      </p:sp>
-      <p:sp>
-        <p:nvSpPr>
-          <p:cNvPr id="13" name="Text 11"/>
           <p:cNvSpPr/>
           <p:nvPr/>
         </p:nvSpPr>
@@ -3547,7 +4148,7 @@
                 <a:ea typeface="Georgia" pitchFamily="34" charset="-122"/>
                 <a:cs typeface="Georgia" pitchFamily="34" charset="-120"/>
               </a:rPr>
-              <a:t>Story (5 min)</a:t>
+              <a:t>Settle + chant (5 min)</a:t>
             </a:r>
             <a:endParaRPr lang="en-US" sz="1800" dirty="0"/>
           </a:p>
@@ -3561,8 +4162,8 @@
         </p:nvSpPr>
         <p:spPr>
           <a:xfrm>
-            <a:off x="634901" y="883593"/>
-            <a:ext cx="8102798" cy="281880"/>
+            <a:off x="406301" y="870942"/>
+            <a:ext cx="8498026" cy="213271"/>
           </a:xfrm>
           <a:prstGeom prst="rect">
             <a:avLst/>
@@ -3574,18 +4175,20 @@
           <a:bodyPr wrap="square" lIns="0" tIns="0" rIns="0" bIns="0" rtlCol="0" anchor="t"/>
           <a:lstStyle/>
           <a:p>
-            <a:pPr algn="l" marL="342900" indent="-342900">
-              <a:lnSpc>
-                <a:spcPts val="1620"/>
-              </a:lnSpc>
+            <a:pPr algn="l" indent="0" marL="0">
+              <a:lnSpc>
+                <a:spcPts val="1680"/>
+              </a:lnSpc>
+              <a:spcBef>
+                <a:spcPts val="300"/>
+              </a:spcBef>
               <a:spcAft>
                 <a:spcPts val="300"/>
               </a:spcAft>
-              <a:buSzPct val="100000"/>
-              <a:buChar char="•"/>
-            </a:pPr>
-            <a:r>
-              <a:rPr lang="en-US" sz="1200" i="1" dirty="0">
+              <a:buNone/>
+            </a:pPr>
+            <a:r>
+              <a:rPr lang="en-US" sz="1200" dirty="0">
                 <a:solidFill>
                   <a:srgbClr val="2C2C2C"/>
                 </a:solidFill>
@@ -3593,7 +4196,7 @@
                 <a:ea typeface="Verdana" pitchFamily="34" charset="-122"/>
                 <a:cs typeface="Verdana" pitchFamily="34" charset="-120"/>
               </a:rPr>
-              <a:t>"Today we make the twins so fast we don't even think. We just KNOW."</a:t>
+              <a:t>Sing the chant:</a:t>
             </a:r>
             <a:endParaRPr lang="en-US" sz="1200" dirty="0"/>
           </a:p>
@@ -3607,8 +4210,109 @@
         </p:nvSpPr>
         <p:spPr>
           <a:xfrm>
-            <a:off x="406301" y="1254323"/>
-            <a:ext cx="8498026" cy="426541"/>
+            <a:off x="406301" y="1173063"/>
+            <a:ext cx="8331398" cy="611981"/>
+          </a:xfrm>
+          <a:prstGeom prst="rect">
+            <a:avLst/>
+          </a:prstGeom>
+          <a:solidFill>
+            <a:srgbClr val="FFFFFF"/>
+          </a:solidFill>
+          <a:ln/>
+        </p:spPr>
+        <p:txBody>
+          <a:bodyPr wrap="square" rtlCol="0" anchor="ctr"/>
+          <a:lstStyle/>
+          <a:p>
+            <a:pPr indent="0" marL="0">
+              <a:buNone/>
+            </a:pPr>
+            <a:endParaRPr lang="en-US" dirty="0"/>
+          </a:p>
+        </p:txBody>
+      </p:sp>
+      <p:sp>
+        <p:nvSpPr>
+          <p:cNvPr id="6" name="Shape 4"/>
+          <p:cNvSpPr/>
+          <p:nvPr/>
+        </p:nvSpPr>
+        <p:spPr>
+          <a:xfrm>
+            <a:off x="434876" y="1173063"/>
+            <a:ext cx="0" cy="611981"/>
+          </a:xfrm>
+          <a:prstGeom prst="line">
+            <a:avLst/>
+          </a:prstGeom>
+          <a:noFill/>
+          <a:ln w="57150">
+            <a:solidFill>
+              <a:srgbClr val="E07A5F"/>
+            </a:solidFill>
+            <a:prstDash val="solid"/>
+          </a:ln>
+        </p:spPr>
+      </p:sp>
+      <p:sp>
+        <p:nvSpPr>
+          <p:cNvPr id="7" name="Text 5"/>
+          <p:cNvSpPr/>
+          <p:nvPr/>
+        </p:nvSpPr>
+        <p:spPr>
+          <a:xfrm>
+            <a:off x="692051" y="1363563"/>
+            <a:ext cx="7973389" cy="230981"/>
+          </a:xfrm>
+          <a:prstGeom prst="rect">
+            <a:avLst/>
+          </a:prstGeom>
+          <a:noFill/>
+          <a:ln/>
+        </p:spPr>
+        <p:txBody>
+          <a:bodyPr wrap="square" lIns="0" tIns="0" rIns="0" bIns="0" rtlCol="0" anchor="t"/>
+          <a:lstStyle/>
+          <a:p>
+            <a:pPr algn="l" indent="0" marL="0">
+              <a:lnSpc>
+                <a:spcPts val="1820"/>
+              </a:lnSpc>
+              <a:spcBef>
+                <a:spcPts val="300"/>
+              </a:spcBef>
+              <a:spcAft>
+                <a:spcPts val="300"/>
+              </a:spcAft>
+              <a:buNone/>
+            </a:pPr>
+            <a:r>
+              <a:rPr lang="en-US" sz="1300" i="1" dirty="0">
+                <a:solidFill>
+                  <a:srgbClr val="2C2C2C"/>
+                </a:solidFill>
+                <a:latin typeface="Georgia" pitchFamily="34" charset="0"/>
+                <a:ea typeface="Georgia" pitchFamily="34" charset="-122"/>
+                <a:cs typeface="Georgia" pitchFamily="34" charset="-120"/>
+              </a:rPr>
+              <a:t>"1 and 9 make 10! 2 and 8 make 10! 3 and 7 make 10! 4 and 6 make 10! 5 and 5 make 10!"</a:t>
+            </a:r>
+            <a:endParaRPr lang="en-US" sz="1300" dirty="0"/>
+          </a:p>
+        </p:txBody>
+      </p:sp>
+      <p:sp>
+        <p:nvSpPr>
+          <p:cNvPr id="8" name="Text 6"/>
+          <p:cNvSpPr/>
+          <p:nvPr/>
+        </p:nvSpPr>
+        <p:spPr>
+          <a:xfrm>
+            <a:off x="406301" y="1873895"/>
+            <a:ext cx="8498026" cy="213271"/>
           </a:xfrm>
           <a:prstGeom prst="rect">
             <a:avLst/>
@@ -3641,7 +4345,7 @@
                 <a:ea typeface="Verdana" pitchFamily="34" charset="-122"/>
                 <a:cs typeface="Verdana" pitchFamily="34" charset="-120"/>
               </a:rPr>
-              <a:t>– Hold up the wall poster. Walk through the 5 pairs. Notice: each pair appears twice in the "twin" naming — 1's twin is 9 AND 9's twin is 1.</a:t>
+              <a:t>Three times, with claps.</a:t>
             </a:r>
             <a:endParaRPr lang="en-US" sz="1200" dirty="0"/>
           </a:p>
@@ -3649,7 +4353,55 @@
       </p:sp>
       <p:sp>
         <p:nvSpPr>
-          <p:cNvPr id="6" name="Text 4"/>
+          <p:cNvPr id="9" name="Text 7"/>
+          <p:cNvSpPr/>
+          <p:nvPr/>
+        </p:nvSpPr>
+        <p:spPr>
+          <a:xfrm>
+            <a:off x="406301" y="2163366"/>
+            <a:ext cx="8498026" cy="213271"/>
+          </a:xfrm>
+          <a:prstGeom prst="rect">
+            <a:avLst/>
+          </a:prstGeom>
+          <a:noFill/>
+          <a:ln/>
+        </p:spPr>
+        <p:txBody>
+          <a:bodyPr wrap="square" lIns="0" tIns="0" rIns="0" bIns="0" rtlCol="0" anchor="t"/>
+          <a:lstStyle/>
+          <a:p>
+            <a:pPr algn="l" indent="0" marL="0">
+              <a:lnSpc>
+                <a:spcPts val="1680"/>
+              </a:lnSpc>
+              <a:spcBef>
+                <a:spcPts val="300"/>
+              </a:spcBef>
+              <a:spcAft>
+                <a:spcPts val="300"/>
+              </a:spcAft>
+              <a:buNone/>
+            </a:pPr>
+            <a:r>
+              <a:rPr lang="en-US" sz="1200" dirty="0">
+                <a:solidFill>
+                  <a:srgbClr val="2C2C2C"/>
+                </a:solidFill>
+                <a:latin typeface="Verdana" pitchFamily="34" charset="0"/>
+                <a:ea typeface="Verdana" pitchFamily="34" charset="-122"/>
+                <a:cs typeface="Verdana" pitchFamily="34" charset="-120"/>
+              </a:rPr>
+              <a:t>Now add the "deficit" version (just renaming):</a:t>
+            </a:r>
+            <a:endParaRPr lang="en-US" sz="1200" dirty="0"/>
+          </a:p>
+        </p:txBody>
+      </p:sp>
+      <p:sp>
+        <p:nvSpPr>
+          <p:cNvPr id="10" name="Text 8"/>
           <p:cNvSpPr/>
           <p:nvPr/>
         </p:nvSpPr>
@@ -3799,7 +4551,7 @@
                 <a:ea typeface="Georgia" pitchFamily="34" charset="-122"/>
                 <a:cs typeface="Georgia" pitchFamily="34" charset="-120"/>
               </a:rPr>
-              <a:t>Lightning round (10 min)</a:t>
+              <a:t>Settle + chant (5 min) (cont.)</a:t>
             </a:r>
             <a:endParaRPr lang="en-US" sz="1800" dirty="0"/>
           </a:p>
@@ -3813,104 +4565,8 @@
         </p:nvSpPr>
         <p:spPr>
           <a:xfrm>
-            <a:off x="406301" y="870942"/>
-            <a:ext cx="8498026" cy="213271"/>
-          </a:xfrm>
-          <a:prstGeom prst="rect">
-            <a:avLst/>
-          </a:prstGeom>
-          <a:noFill/>
-          <a:ln/>
-        </p:spPr>
-        <p:txBody>
-          <a:bodyPr wrap="square" lIns="0" tIns="0" rIns="0" bIns="0" rtlCol="0" anchor="t"/>
-          <a:lstStyle/>
-          <a:p>
-            <a:pPr algn="l" indent="0" marL="0">
-              <a:lnSpc>
-                <a:spcPts val="1680"/>
-              </a:lnSpc>
-              <a:spcBef>
-                <a:spcPts val="300"/>
-              </a:spcBef>
-              <a:spcAft>
-                <a:spcPts val="300"/>
-              </a:spcAft>
-              <a:buNone/>
-            </a:pPr>
-            <a:r>
-              <a:rPr lang="en-US" sz="1200" dirty="0">
-                <a:solidFill>
-                  <a:srgbClr val="2C2C2C"/>
-                </a:solidFill>
-                <a:latin typeface="Verdana" pitchFamily="34" charset="0"/>
-                <a:ea typeface="Verdana" pitchFamily="34" charset="-122"/>
-                <a:cs typeface="Verdana" pitchFamily="34" charset="-120"/>
-              </a:rPr>
-              <a:t>– Teacher holds up a digit. Class chorus the twin. – Do 20 in 60 seconds. – Repeat with random sequence.</a:t>
-            </a:r>
-            <a:endParaRPr lang="en-US" sz="1200" dirty="0"/>
-          </a:p>
-        </p:txBody>
-      </p:sp>
-      <p:sp>
-        <p:nvSpPr>
-          <p:cNvPr id="5" name="Text 3"/>
-          <p:cNvSpPr/>
-          <p:nvPr/>
-        </p:nvSpPr>
-        <p:spPr>
-          <a:xfrm>
-            <a:off x="406301" y="1160413"/>
-            <a:ext cx="8498026" cy="213271"/>
-          </a:xfrm>
-          <a:prstGeom prst="rect">
-            <a:avLst/>
-          </a:prstGeom>
-          <a:noFill/>
-          <a:ln/>
-        </p:spPr>
-        <p:txBody>
-          <a:bodyPr wrap="square" lIns="0" tIns="0" rIns="0" bIns="0" rtlCol="0" anchor="t"/>
-          <a:lstStyle/>
-          <a:p>
-            <a:pPr algn="l" indent="0" marL="0">
-              <a:lnSpc>
-                <a:spcPts val="1680"/>
-              </a:lnSpc>
-              <a:spcBef>
-                <a:spcPts val="300"/>
-              </a:spcBef>
-              <a:spcAft>
-                <a:spcPts val="300"/>
-              </a:spcAft>
-              <a:buNone/>
-            </a:pPr>
-            <a:r>
-              <a:rPr lang="en-US" sz="1200" dirty="0">
-                <a:solidFill>
-                  <a:srgbClr val="2C2C2C"/>
-                </a:solidFill>
-                <a:latin typeface="Verdana" pitchFamily="34" charset="0"/>
-                <a:ea typeface="Verdana" pitchFamily="34" charset="-122"/>
-                <a:cs typeface="Verdana" pitchFamily="34" charset="-120"/>
-              </a:rPr>
-              <a:t>Sequence example:</a:t>
-            </a:r>
-            <a:endParaRPr lang="en-US" sz="1200" dirty="0"/>
-          </a:p>
-        </p:txBody>
-      </p:sp>
-      <p:sp>
-        <p:nvSpPr>
-          <p:cNvPr id="6" name="Text 4"/>
-          <p:cNvSpPr/>
-          <p:nvPr/>
-        </p:nvSpPr>
-        <p:spPr>
-          <a:xfrm>
-            <a:off x="406301" y="1462534"/>
-            <a:ext cx="8331398" cy="2523381"/>
+            <a:off x="406301" y="883593"/>
+            <a:ext cx="8331398" cy="611981"/>
           </a:xfrm>
           <a:prstGeom prst="rect">
             <a:avLst/>
@@ -3933,22 +4589,22 @@
       </p:sp>
       <p:sp>
         <p:nvSpPr>
-          <p:cNvPr id="7" name="Shape 5"/>
-          <p:cNvSpPr/>
-          <p:nvPr/>
-        </p:nvSpPr>
-        <p:spPr>
-          <a:xfrm>
-            <a:off x="430113" y="1462534"/>
-            <a:ext cx="0" cy="2523381"/>
+          <p:cNvPr id="5" name="Shape 3"/>
+          <p:cNvSpPr/>
+          <p:nvPr/>
+        </p:nvSpPr>
+        <p:spPr>
+          <a:xfrm>
+            <a:off x="434876" y="883593"/>
+            <a:ext cx="0" cy="611981"/>
           </a:xfrm>
           <a:prstGeom prst="line">
             <a:avLst/>
           </a:prstGeom>
           <a:noFill/>
-          <a:ln w="47625">
+          <a:ln w="57150">
             <a:solidFill>
-              <a:srgbClr val="87A96B"/>
+              <a:srgbClr val="E07A5F"/>
             </a:solidFill>
             <a:prstDash val="solid"/>
           </a:ln>
@@ -3956,14 +4612,14 @@
       </p:sp>
       <p:sp>
         <p:nvSpPr>
-          <p:cNvPr id="8" name="Text 6"/>
-          <p:cNvSpPr/>
-          <p:nvPr/>
-        </p:nvSpPr>
-        <p:spPr>
-          <a:xfrm>
-            <a:off x="631627" y="1589484"/>
-            <a:ext cx="8086939" cy="174575"/>
+          <p:cNvPr id="6" name="Text 4"/>
+          <p:cNvSpPr/>
+          <p:nvPr/>
+        </p:nvSpPr>
+        <p:spPr>
+          <a:xfrm>
+            <a:off x="692051" y="1074093"/>
+            <a:ext cx="7973389" cy="230981"/>
           </a:xfrm>
           <a:prstGeom prst="rect">
             <a:avLst/>
@@ -3977,532 +4633,34 @@
           <a:p>
             <a:pPr algn="l" indent="0" marL="0">
               <a:lnSpc>
-                <a:spcPts val="1375"/>
-              </a:lnSpc>
-              <a:buNone/>
-            </a:pPr>
-            <a:r>
-              <a:rPr lang="en-US" sz="1100" dirty="0">
+                <a:spcPts val="1820"/>
+              </a:lnSpc>
+              <a:spcBef>
+                <a:spcPts val="300"/>
+              </a:spcBef>
+              <a:spcAft>
+                <a:spcPts val="300"/>
+              </a:spcAft>
+              <a:buNone/>
+            </a:pPr>
+            <a:r>
+              <a:rPr lang="en-US" sz="1300" i="1" dirty="0">
                 <a:solidFill>
                   <a:srgbClr val="2C2C2C"/>
                 </a:solidFill>
-                <a:latin typeface="Courier New" pitchFamily="34" charset="0"/>
-                <a:ea typeface="Courier New" pitchFamily="34" charset="-122"/>
-                <a:cs typeface="Courier New" pitchFamily="34" charset="-120"/>
-              </a:rPr>
-              <a:t>7 → 3</a:t>
-            </a:r>
-            <a:endParaRPr lang="en-US" sz="1100" dirty="0"/>
-          </a:p>
-        </p:txBody>
-      </p:sp>
-      <p:sp>
-        <p:nvSpPr>
-          <p:cNvPr id="9" name="Text 7"/>
-          <p:cNvSpPr/>
-          <p:nvPr/>
-        </p:nvSpPr>
-        <p:spPr>
-          <a:xfrm>
-            <a:off x="631627" y="1764060"/>
-            <a:ext cx="8086939" cy="174575"/>
-          </a:xfrm>
-          <a:prstGeom prst="rect">
-            <a:avLst/>
-          </a:prstGeom>
-          <a:noFill/>
-          <a:ln/>
-        </p:spPr>
-        <p:txBody>
-          <a:bodyPr wrap="square" lIns="0" tIns="0" rIns="0" bIns="0" rtlCol="0" anchor="t"/>
-          <a:lstStyle/>
-          <a:p>
-            <a:pPr algn="l" indent="0" marL="0">
-              <a:lnSpc>
-                <a:spcPts val="1375"/>
-              </a:lnSpc>
-              <a:buNone/>
-            </a:pPr>
-            <a:r>
-              <a:rPr lang="en-US" sz="1100" dirty="0">
-                <a:solidFill>
-                  <a:srgbClr val="2C2C2C"/>
-                </a:solidFill>
-                <a:latin typeface="Courier New" pitchFamily="34" charset="0"/>
-                <a:ea typeface="Courier New" pitchFamily="34" charset="-122"/>
-                <a:cs typeface="Courier New" pitchFamily="34" charset="-120"/>
-              </a:rPr>
-              <a:t>8 → 2</a:t>
-            </a:r>
-            <a:endParaRPr lang="en-US" sz="1100" dirty="0"/>
-          </a:p>
-        </p:txBody>
-      </p:sp>
-      <p:sp>
-        <p:nvSpPr>
-          <p:cNvPr id="10" name="Text 8"/>
-          <p:cNvSpPr/>
-          <p:nvPr/>
-        </p:nvSpPr>
-        <p:spPr>
-          <a:xfrm>
-            <a:off x="631627" y="1938635"/>
-            <a:ext cx="8086939" cy="174575"/>
-          </a:xfrm>
-          <a:prstGeom prst="rect">
-            <a:avLst/>
-          </a:prstGeom>
-          <a:noFill/>
-          <a:ln/>
-        </p:spPr>
-        <p:txBody>
-          <a:bodyPr wrap="square" lIns="0" tIns="0" rIns="0" bIns="0" rtlCol="0" anchor="t"/>
-          <a:lstStyle/>
-          <a:p>
-            <a:pPr algn="l" indent="0" marL="0">
-              <a:lnSpc>
-                <a:spcPts val="1375"/>
-              </a:lnSpc>
-              <a:buNone/>
-            </a:pPr>
-            <a:r>
-              <a:rPr lang="en-US" sz="1100" dirty="0">
-                <a:solidFill>
-                  <a:srgbClr val="2C2C2C"/>
-                </a:solidFill>
-                <a:latin typeface="Courier New" pitchFamily="34" charset="0"/>
-                <a:ea typeface="Courier New" pitchFamily="34" charset="-122"/>
-                <a:cs typeface="Courier New" pitchFamily="34" charset="-120"/>
-              </a:rPr>
-              <a:t>6 → 4</a:t>
-            </a:r>
-            <a:endParaRPr lang="en-US" sz="1100" dirty="0"/>
-          </a:p>
-        </p:txBody>
-      </p:sp>
-      <p:sp>
-        <p:nvSpPr>
-          <p:cNvPr id="11" name="Text 9"/>
-          <p:cNvSpPr/>
-          <p:nvPr/>
-        </p:nvSpPr>
-        <p:spPr>
-          <a:xfrm>
-            <a:off x="631627" y="2113211"/>
-            <a:ext cx="8086939" cy="174575"/>
-          </a:xfrm>
-          <a:prstGeom prst="rect">
-            <a:avLst/>
-          </a:prstGeom>
-          <a:noFill/>
-          <a:ln/>
-        </p:spPr>
-        <p:txBody>
-          <a:bodyPr wrap="square" lIns="0" tIns="0" rIns="0" bIns="0" rtlCol="0" anchor="t"/>
-          <a:lstStyle/>
-          <a:p>
-            <a:pPr algn="l" indent="0" marL="0">
-              <a:lnSpc>
-                <a:spcPts val="1375"/>
-              </a:lnSpc>
-              <a:buNone/>
-            </a:pPr>
-            <a:r>
-              <a:rPr lang="en-US" sz="1100" dirty="0">
-                <a:solidFill>
-                  <a:srgbClr val="2C2C2C"/>
-                </a:solidFill>
-                <a:latin typeface="Courier New" pitchFamily="34" charset="0"/>
-                <a:ea typeface="Courier New" pitchFamily="34" charset="-122"/>
-                <a:cs typeface="Courier New" pitchFamily="34" charset="-120"/>
-              </a:rPr>
-              <a:t>9 → 1</a:t>
-            </a:r>
-            <a:endParaRPr lang="en-US" sz="1100" dirty="0"/>
-          </a:p>
-        </p:txBody>
-      </p:sp>
-      <p:sp>
-        <p:nvSpPr>
-          <p:cNvPr id="12" name="Text 10"/>
-          <p:cNvSpPr/>
-          <p:nvPr/>
-        </p:nvSpPr>
-        <p:spPr>
-          <a:xfrm>
-            <a:off x="631627" y="2287786"/>
-            <a:ext cx="8086939" cy="174575"/>
-          </a:xfrm>
-          <a:prstGeom prst="rect">
-            <a:avLst/>
-          </a:prstGeom>
-          <a:noFill/>
-          <a:ln/>
-        </p:spPr>
-        <p:txBody>
-          <a:bodyPr wrap="square" lIns="0" tIns="0" rIns="0" bIns="0" rtlCol="0" anchor="t"/>
-          <a:lstStyle/>
-          <a:p>
-            <a:pPr algn="l" indent="0" marL="0">
-              <a:lnSpc>
-                <a:spcPts val="1375"/>
-              </a:lnSpc>
-              <a:buNone/>
-            </a:pPr>
-            <a:r>
-              <a:rPr lang="en-US" sz="1100" dirty="0">
-                <a:solidFill>
-                  <a:srgbClr val="2C2C2C"/>
-                </a:solidFill>
-                <a:latin typeface="Courier New" pitchFamily="34" charset="0"/>
-                <a:ea typeface="Courier New" pitchFamily="34" charset="-122"/>
-                <a:cs typeface="Courier New" pitchFamily="34" charset="-120"/>
-              </a:rPr>
-              <a:t>5 → 5</a:t>
-            </a:r>
-            <a:endParaRPr lang="en-US" sz="1100" dirty="0"/>
-          </a:p>
-        </p:txBody>
-      </p:sp>
-      <p:sp>
-        <p:nvSpPr>
-          <p:cNvPr id="13" name="Text 11"/>
-          <p:cNvSpPr/>
-          <p:nvPr/>
-        </p:nvSpPr>
-        <p:spPr>
-          <a:xfrm>
-            <a:off x="631627" y="2462361"/>
-            <a:ext cx="8086939" cy="174575"/>
-          </a:xfrm>
-          <a:prstGeom prst="rect">
-            <a:avLst/>
-          </a:prstGeom>
-          <a:noFill/>
-          <a:ln/>
-        </p:spPr>
-        <p:txBody>
-          <a:bodyPr wrap="square" lIns="0" tIns="0" rIns="0" bIns="0" rtlCol="0" anchor="t"/>
-          <a:lstStyle/>
-          <a:p>
-            <a:pPr algn="l" indent="0" marL="0">
-              <a:lnSpc>
-                <a:spcPts val="1375"/>
-              </a:lnSpc>
-              <a:buNone/>
-            </a:pPr>
-            <a:r>
-              <a:rPr lang="en-US" sz="1100" dirty="0">
-                <a:solidFill>
-                  <a:srgbClr val="2C2C2C"/>
-                </a:solidFill>
-                <a:latin typeface="Courier New" pitchFamily="34" charset="0"/>
-                <a:ea typeface="Courier New" pitchFamily="34" charset="-122"/>
-                <a:cs typeface="Courier New" pitchFamily="34" charset="-120"/>
-              </a:rPr>
-              <a:t>4 → 6</a:t>
-            </a:r>
-            <a:endParaRPr lang="en-US" sz="1100" dirty="0"/>
-          </a:p>
-        </p:txBody>
-      </p:sp>
-      <p:sp>
-        <p:nvSpPr>
-          <p:cNvPr id="14" name="Text 12"/>
-          <p:cNvSpPr/>
-          <p:nvPr/>
-        </p:nvSpPr>
-        <p:spPr>
-          <a:xfrm>
-            <a:off x="631627" y="2636937"/>
-            <a:ext cx="8086939" cy="174575"/>
-          </a:xfrm>
-          <a:prstGeom prst="rect">
-            <a:avLst/>
-          </a:prstGeom>
-          <a:noFill/>
-          <a:ln/>
-        </p:spPr>
-        <p:txBody>
-          <a:bodyPr wrap="square" lIns="0" tIns="0" rIns="0" bIns="0" rtlCol="0" anchor="t"/>
-          <a:lstStyle/>
-          <a:p>
-            <a:pPr algn="l" indent="0" marL="0">
-              <a:lnSpc>
-                <a:spcPts val="1375"/>
-              </a:lnSpc>
-              <a:buNone/>
-            </a:pPr>
-            <a:r>
-              <a:rPr lang="en-US" sz="1100" dirty="0">
-                <a:solidFill>
-                  <a:srgbClr val="2C2C2C"/>
-                </a:solidFill>
-                <a:latin typeface="Courier New" pitchFamily="34" charset="0"/>
-                <a:ea typeface="Courier New" pitchFamily="34" charset="-122"/>
-                <a:cs typeface="Courier New" pitchFamily="34" charset="-120"/>
-              </a:rPr>
-              <a:t>3 → 7</a:t>
-            </a:r>
-            <a:endParaRPr lang="en-US" sz="1100" dirty="0"/>
-          </a:p>
-        </p:txBody>
-      </p:sp>
-      <p:sp>
-        <p:nvSpPr>
-          <p:cNvPr id="15" name="Text 13"/>
-          <p:cNvSpPr/>
-          <p:nvPr/>
-        </p:nvSpPr>
-        <p:spPr>
-          <a:xfrm>
-            <a:off x="631627" y="2811512"/>
-            <a:ext cx="8086939" cy="174575"/>
-          </a:xfrm>
-          <a:prstGeom prst="rect">
-            <a:avLst/>
-          </a:prstGeom>
-          <a:noFill/>
-          <a:ln/>
-        </p:spPr>
-        <p:txBody>
-          <a:bodyPr wrap="square" lIns="0" tIns="0" rIns="0" bIns="0" rtlCol="0" anchor="t"/>
-          <a:lstStyle/>
-          <a:p>
-            <a:pPr algn="l" indent="0" marL="0">
-              <a:lnSpc>
-                <a:spcPts val="1375"/>
-              </a:lnSpc>
-              <a:buNone/>
-            </a:pPr>
-            <a:r>
-              <a:rPr lang="en-US" sz="1100" dirty="0">
-                <a:solidFill>
-                  <a:srgbClr val="2C2C2C"/>
-                </a:solidFill>
-                <a:latin typeface="Courier New" pitchFamily="34" charset="0"/>
-                <a:ea typeface="Courier New" pitchFamily="34" charset="-122"/>
-                <a:cs typeface="Courier New" pitchFamily="34" charset="-120"/>
-              </a:rPr>
-              <a:t>2 → 8</a:t>
-            </a:r>
-            <a:endParaRPr lang="en-US" sz="1100" dirty="0"/>
-          </a:p>
-        </p:txBody>
-      </p:sp>
-      <p:sp>
-        <p:nvSpPr>
-          <p:cNvPr id="16" name="Text 14"/>
-          <p:cNvSpPr/>
-          <p:nvPr/>
-        </p:nvSpPr>
-        <p:spPr>
-          <a:xfrm>
-            <a:off x="631627" y="2986088"/>
-            <a:ext cx="8086939" cy="174575"/>
-          </a:xfrm>
-          <a:prstGeom prst="rect">
-            <a:avLst/>
-          </a:prstGeom>
-          <a:noFill/>
-          <a:ln/>
-        </p:spPr>
-        <p:txBody>
-          <a:bodyPr wrap="square" lIns="0" tIns="0" rIns="0" bIns="0" rtlCol="0" anchor="t"/>
-          <a:lstStyle/>
-          <a:p>
-            <a:pPr algn="l" indent="0" marL="0">
-              <a:lnSpc>
-                <a:spcPts val="1375"/>
-              </a:lnSpc>
-              <a:buNone/>
-            </a:pPr>
-            <a:r>
-              <a:rPr lang="en-US" sz="1100" dirty="0">
-                <a:solidFill>
-                  <a:srgbClr val="2C2C2C"/>
-                </a:solidFill>
-                <a:latin typeface="Courier New" pitchFamily="34" charset="0"/>
-                <a:ea typeface="Courier New" pitchFamily="34" charset="-122"/>
-                <a:cs typeface="Courier New" pitchFamily="34" charset="-120"/>
-              </a:rPr>
-              <a:t>1 → 9</a:t>
-            </a:r>
-            <a:endParaRPr lang="en-US" sz="1100" dirty="0"/>
-          </a:p>
-        </p:txBody>
-      </p:sp>
-      <p:sp>
-        <p:nvSpPr>
-          <p:cNvPr id="17" name="Text 15"/>
-          <p:cNvSpPr/>
-          <p:nvPr/>
-        </p:nvSpPr>
-        <p:spPr>
-          <a:xfrm>
-            <a:off x="631627" y="3160663"/>
-            <a:ext cx="8086939" cy="174575"/>
-          </a:xfrm>
-          <a:prstGeom prst="rect">
-            <a:avLst/>
-          </a:prstGeom>
-          <a:noFill/>
-          <a:ln/>
-        </p:spPr>
-        <p:txBody>
-          <a:bodyPr wrap="square" lIns="0" tIns="0" rIns="0" bIns="0" rtlCol="0" anchor="t"/>
-          <a:lstStyle/>
-          <a:p>
-            <a:pPr algn="l" indent="0" marL="0">
-              <a:lnSpc>
-                <a:spcPts val="1375"/>
-              </a:lnSpc>
-              <a:buNone/>
-            </a:pPr>
-            <a:r>
-              <a:rPr lang="en-US" sz="1100" dirty="0">
-                <a:solidFill>
-                  <a:srgbClr val="2C2C2C"/>
-                </a:solidFill>
-                <a:latin typeface="Courier New" pitchFamily="34" charset="0"/>
-                <a:ea typeface="Courier New" pitchFamily="34" charset="-122"/>
-                <a:cs typeface="Courier New" pitchFamily="34" charset="-120"/>
-              </a:rPr>
-              <a:t>8 → 2</a:t>
-            </a:r>
-            <a:endParaRPr lang="en-US" sz="1100" dirty="0"/>
-          </a:p>
-        </p:txBody>
-      </p:sp>
-      <p:sp>
-        <p:nvSpPr>
-          <p:cNvPr id="18" name="Text 16"/>
-          <p:cNvSpPr/>
-          <p:nvPr/>
-        </p:nvSpPr>
-        <p:spPr>
-          <a:xfrm>
-            <a:off x="631627" y="3335238"/>
-            <a:ext cx="8086939" cy="174575"/>
-          </a:xfrm>
-          <a:prstGeom prst="rect">
-            <a:avLst/>
-          </a:prstGeom>
-          <a:noFill/>
-          <a:ln/>
-        </p:spPr>
-        <p:txBody>
-          <a:bodyPr wrap="square" lIns="0" tIns="0" rIns="0" bIns="0" rtlCol="0" anchor="t"/>
-          <a:lstStyle/>
-          <a:p>
-            <a:pPr algn="l" indent="0" marL="0">
-              <a:lnSpc>
-                <a:spcPts val="1375"/>
-              </a:lnSpc>
-              <a:buNone/>
-            </a:pPr>
-            <a:r>
-              <a:rPr lang="en-US" sz="1100" dirty="0">
-                <a:solidFill>
-                  <a:srgbClr val="2C2C2C"/>
-                </a:solidFill>
-                <a:latin typeface="Courier New" pitchFamily="34" charset="0"/>
-                <a:ea typeface="Courier New" pitchFamily="34" charset="-122"/>
-                <a:cs typeface="Courier New" pitchFamily="34" charset="-120"/>
-              </a:rPr>
-              <a:t>6 → 4</a:t>
-            </a:r>
-            <a:endParaRPr lang="en-US" sz="1100" dirty="0"/>
-          </a:p>
-        </p:txBody>
-      </p:sp>
-      <p:sp>
-        <p:nvSpPr>
-          <p:cNvPr id="19" name="Text 17"/>
-          <p:cNvSpPr/>
-          <p:nvPr/>
-        </p:nvSpPr>
-        <p:spPr>
-          <a:xfrm>
-            <a:off x="631627" y="3509814"/>
-            <a:ext cx="8086939" cy="174575"/>
-          </a:xfrm>
-          <a:prstGeom prst="rect">
-            <a:avLst/>
-          </a:prstGeom>
-          <a:noFill/>
-          <a:ln/>
-        </p:spPr>
-        <p:txBody>
-          <a:bodyPr wrap="square" lIns="0" tIns="0" rIns="0" bIns="0" rtlCol="0" anchor="t"/>
-          <a:lstStyle/>
-          <a:p>
-            <a:pPr algn="l" indent="0" marL="0">
-              <a:lnSpc>
-                <a:spcPts val="1375"/>
-              </a:lnSpc>
-              <a:buNone/>
-            </a:pPr>
-            <a:r>
-              <a:rPr lang="en-US" sz="1100" dirty="0">
-                <a:solidFill>
-                  <a:srgbClr val="2C2C2C"/>
-                </a:solidFill>
-                <a:latin typeface="Courier New" pitchFamily="34" charset="0"/>
-                <a:ea typeface="Courier New" pitchFamily="34" charset="-122"/>
-                <a:cs typeface="Courier New" pitchFamily="34" charset="-120"/>
-              </a:rPr>
-              <a:t>7 → 3</a:t>
-            </a:r>
-            <a:endParaRPr lang="en-US" sz="1100" dirty="0"/>
-          </a:p>
-        </p:txBody>
-      </p:sp>
-      <p:sp>
-        <p:nvSpPr>
-          <p:cNvPr id="20" name="Text 18"/>
-          <p:cNvSpPr/>
-          <p:nvPr/>
-        </p:nvSpPr>
-        <p:spPr>
-          <a:xfrm>
-            <a:off x="631627" y="3684389"/>
-            <a:ext cx="8086939" cy="174575"/>
-          </a:xfrm>
-          <a:prstGeom prst="rect">
-            <a:avLst/>
-          </a:prstGeom>
-          <a:noFill/>
-          <a:ln/>
-        </p:spPr>
-        <p:txBody>
-          <a:bodyPr wrap="square" lIns="0" tIns="0" rIns="0" bIns="0" rtlCol="0" anchor="t"/>
-          <a:lstStyle/>
-          <a:p>
-            <a:pPr algn="l" indent="0" marL="0">
-              <a:lnSpc>
-                <a:spcPts val="1375"/>
-              </a:lnSpc>
-              <a:buNone/>
-            </a:pPr>
-            <a:r>
-              <a:rPr lang="en-US" sz="1100" dirty="0">
-                <a:solidFill>
-                  <a:srgbClr val="2C2C2C"/>
-                </a:solidFill>
-                <a:latin typeface="Courier New" pitchFamily="34" charset="0"/>
-                <a:ea typeface="Courier New" pitchFamily="34" charset="-122"/>
-                <a:cs typeface="Courier New" pitchFamily="34" charset="-120"/>
-              </a:rPr>
-              <a:t>...</a:t>
-            </a:r>
-            <a:endParaRPr lang="en-US" sz="1100" dirty="0"/>
-          </a:p>
-        </p:txBody>
-      </p:sp>
-      <p:sp>
-        <p:nvSpPr>
-          <p:cNvPr id="21" name="Text 19"/>
+                <a:latin typeface="Georgia" pitchFamily="34" charset="0"/>
+                <a:ea typeface="Georgia" pitchFamily="34" charset="-122"/>
+                <a:cs typeface="Georgia" pitchFamily="34" charset="-120"/>
+              </a:rPr>
+              <a:t>"1's twin is 9! 2's twin is 8! 3's twin is 7! 4's twin is 6! 5's twin is itself!"</a:t>
+            </a:r>
+            <a:endParaRPr lang="en-US" sz="1300" dirty="0"/>
+          </a:p>
+        </p:txBody>
+      </p:sp>
+      <p:sp>
+        <p:nvSpPr>
+          <p:cNvPr id="7" name="Text 5"/>
           <p:cNvSpPr/>
           <p:nvPr/>
         </p:nvSpPr>
@@ -4652,7 +4810,7 @@
                 <a:ea typeface="Georgia" pitchFamily="34" charset="-122"/>
                 <a:cs typeface="Georgia" pitchFamily="34" charset="-120"/>
               </a:rPr>
-              <a:t>Card sort (7 min)</a:t>
+              <a:t>Story (5 min)</a:t>
             </a:r>
             <a:endParaRPr lang="en-US" sz="1800" dirty="0"/>
           </a:p>
@@ -4666,8 +4824,8 @@
         </p:nvSpPr>
         <p:spPr>
           <a:xfrm>
-            <a:off x="406301" y="870942"/>
-            <a:ext cx="8498026" cy="426541"/>
+            <a:off x="634901" y="883593"/>
+            <a:ext cx="8102798" cy="731341"/>
           </a:xfrm>
           <a:prstGeom prst="rect">
             <a:avLst/>
@@ -4679,20 +4837,18 @@
           <a:bodyPr wrap="square" lIns="0" tIns="0" rIns="0" bIns="0" rtlCol="0" anchor="t"/>
           <a:lstStyle/>
           <a:p>
-            <a:pPr algn="l" indent="0" marL="0">
-              <a:lnSpc>
-                <a:spcPts val="1680"/>
-              </a:lnSpc>
-              <a:spcBef>
-                <a:spcPts val="300"/>
-              </a:spcBef>
+            <a:pPr algn="l" marL="342900" indent="-342900">
+              <a:lnSpc>
+                <a:spcPts val="1620"/>
+              </a:lnSpc>
               <a:spcAft>
                 <a:spcPts val="300"/>
               </a:spcAft>
-              <a:buNone/>
-            </a:pPr>
-            <a:r>
-              <a:rPr lang="en-US" sz="1200" dirty="0">
+              <a:buSzPct val="100000"/>
+              <a:buChar char="•"/>
+            </a:pPr>
+            <a:r>
+              <a:rPr lang="en-US" sz="1200" i="1" dirty="0">
                 <a:solidFill>
                   <a:srgbClr val="2C2C2C"/>
                 </a:solidFill>
@@ -4700,7 +4856,31 @@
                 <a:ea typeface="Verdana" pitchFamily="34" charset="-122"/>
                 <a:cs typeface="Verdana" pitchFamily="34" charset="-120"/>
               </a:rPr>
-              <a:t>– Each child gets index cards 1–9. – On "Go," they arrange the cards into 5 pairs (with 5's pair being itself or stand-alone). – Fastest 3 children share their arrangement on the floor.</a:t>
+              <a:t>"Today we make the twins so fast we don't even think. We just KNOW."</a:t>
+            </a:r>
+            <a:endParaRPr lang="en-US" sz="1200" dirty="0"/>
+          </a:p>
+          <a:p>
+            <a:pPr algn="l" marL="342900" indent="-342900">
+              <a:lnSpc>
+                <a:spcPts val="1620"/>
+              </a:lnSpc>
+              <a:spcAft>
+                <a:spcPts val="300"/>
+              </a:spcAft>
+              <a:buSzPct val="100000"/>
+              <a:buChar char="•"/>
+            </a:pPr>
+            <a:r>
+              <a:rPr lang="en-US" sz="1200" dirty="0">
+                <a:solidFill>
+                  <a:srgbClr val="2C2C2C"/>
+                </a:solidFill>
+                <a:latin typeface="Verdana" pitchFamily="34" charset="0"/>
+                <a:ea typeface="Verdana" pitchFamily="34" charset="-122"/>
+                <a:cs typeface="Verdana" pitchFamily="34" charset="-120"/>
+              </a:rPr>
+              <a:t>Hold up the wall poster. Walk through the 5 pairs. Notice: each pair appears twice in the "twin" naming — 1's twin is 9 AND 9's twin is 1.</a:t>
             </a:r>
             <a:endParaRPr lang="en-US" sz="1200" dirty="0"/>
           </a:p>
@@ -4858,7 +5038,7 @@
                 <a:ea typeface="Georgia" pitchFamily="34" charset="-122"/>
                 <a:cs typeface="Georgia" pitchFamily="34" charset="-120"/>
               </a:rPr>
-              <a:t>Show + chant (3 min)</a:t>
+              <a:t>Lightning round (10 min)</a:t>
             </a:r>
             <a:endParaRPr lang="en-US" sz="1800" dirty="0"/>
           </a:p>
@@ -4872,8 +5052,8 @@
         </p:nvSpPr>
         <p:spPr>
           <a:xfrm>
-            <a:off x="406301" y="870942"/>
-            <a:ext cx="8498026" cy="213271"/>
+            <a:off x="634901" y="883593"/>
+            <a:ext cx="8102798" cy="769441"/>
           </a:xfrm>
           <a:prstGeom prst="rect">
             <a:avLst/>
@@ -4885,17 +5065,15 @@
           <a:bodyPr wrap="square" lIns="0" tIns="0" rIns="0" bIns="0" rtlCol="0" anchor="t"/>
           <a:lstStyle/>
           <a:p>
-            <a:pPr algn="l" indent="0" marL="0">
-              <a:lnSpc>
-                <a:spcPts val="1680"/>
-              </a:lnSpc>
-              <a:spcBef>
-                <a:spcPts val="300"/>
-              </a:spcBef>
+            <a:pPr algn="l" marL="342900" indent="-342900">
+              <a:lnSpc>
+                <a:spcPts val="1620"/>
+              </a:lnSpc>
               <a:spcAft>
                 <a:spcPts val="300"/>
               </a:spcAft>
-              <a:buNone/>
+              <a:buSzPct val="100000"/>
+              <a:buChar char="•"/>
             </a:pPr>
             <a:r>
               <a:rPr lang="en-US" sz="1200" dirty="0">
@@ -4906,15 +5084,111 @@
                 <a:ea typeface="Verdana" pitchFamily="34" charset="-122"/>
                 <a:cs typeface="Verdana" pitchFamily="34" charset="-120"/>
               </a:rPr>
-              <a:t>– Final chant. Pull the index cards back into the deck.</a:t>
+              <a:t>Teacher holds up a digit. Class chorus the twin.</a:t>
             </a:r>
             <a:endParaRPr lang="en-US" sz="1200" dirty="0"/>
           </a:p>
+          <a:p>
+            <a:pPr algn="l" marL="342900" indent="-342900">
+              <a:lnSpc>
+                <a:spcPts val="1620"/>
+              </a:lnSpc>
+              <a:spcAft>
+                <a:spcPts val="300"/>
+              </a:spcAft>
+              <a:buSzPct val="100000"/>
+              <a:buChar char="•"/>
+            </a:pPr>
+            <a:r>
+              <a:rPr lang="en-US" sz="1200" dirty="0">
+                <a:solidFill>
+                  <a:srgbClr val="2C2C2C"/>
+                </a:solidFill>
+                <a:latin typeface="Verdana" pitchFamily="34" charset="0"/>
+                <a:ea typeface="Verdana" pitchFamily="34" charset="-122"/>
+                <a:cs typeface="Verdana" pitchFamily="34" charset="-120"/>
+              </a:rPr>
+              <a:t>Do 20 in 60 seconds.</a:t>
+            </a:r>
+            <a:endParaRPr lang="en-US" sz="1200" dirty="0"/>
+          </a:p>
+          <a:p>
+            <a:pPr algn="l" marL="342900" indent="-342900">
+              <a:lnSpc>
+                <a:spcPts val="1620"/>
+              </a:lnSpc>
+              <a:spcAft>
+                <a:spcPts val="300"/>
+              </a:spcAft>
+              <a:buSzPct val="100000"/>
+              <a:buChar char="•"/>
+            </a:pPr>
+            <a:r>
+              <a:rPr lang="en-US" sz="1200" dirty="0">
+                <a:solidFill>
+                  <a:srgbClr val="2C2C2C"/>
+                </a:solidFill>
+                <a:latin typeface="Verdana" pitchFamily="34" charset="0"/>
+                <a:ea typeface="Verdana" pitchFamily="34" charset="-122"/>
+                <a:cs typeface="Verdana" pitchFamily="34" charset="-120"/>
+              </a:rPr>
+              <a:t>Repeat with random sequence.</a:t>
+            </a:r>
+            <a:endParaRPr lang="en-US" sz="1200" dirty="0"/>
+          </a:p>
         </p:txBody>
       </p:sp>
       <p:sp>
         <p:nvSpPr>
           <p:cNvPr id="5" name="Text 3"/>
+          <p:cNvSpPr/>
+          <p:nvPr/>
+        </p:nvSpPr>
+        <p:spPr>
+          <a:xfrm>
+            <a:off x="406301" y="1741884"/>
+            <a:ext cx="8498026" cy="213271"/>
+          </a:xfrm>
+          <a:prstGeom prst="rect">
+            <a:avLst/>
+          </a:prstGeom>
+          <a:noFill/>
+          <a:ln/>
+        </p:spPr>
+        <p:txBody>
+          <a:bodyPr wrap="square" lIns="0" tIns="0" rIns="0" bIns="0" rtlCol="0" anchor="t"/>
+          <a:lstStyle/>
+          <a:p>
+            <a:pPr algn="l" indent="0" marL="0">
+              <a:lnSpc>
+                <a:spcPts val="1680"/>
+              </a:lnSpc>
+              <a:spcBef>
+                <a:spcPts val="300"/>
+              </a:spcBef>
+              <a:spcAft>
+                <a:spcPts val="300"/>
+              </a:spcAft>
+              <a:buNone/>
+            </a:pPr>
+            <a:r>
+              <a:rPr lang="en-US" sz="1200" dirty="0">
+                <a:solidFill>
+                  <a:srgbClr val="2C2C2C"/>
+                </a:solidFill>
+                <a:latin typeface="Verdana" pitchFamily="34" charset="0"/>
+                <a:ea typeface="Verdana" pitchFamily="34" charset="-122"/>
+                <a:cs typeface="Verdana" pitchFamily="34" charset="-120"/>
+              </a:rPr>
+              <a:t>Sequence example:</a:t>
+            </a:r>
+            <a:endParaRPr lang="en-US" sz="1200" dirty="0"/>
+          </a:p>
+        </p:txBody>
+      </p:sp>
+      <p:sp>
+        <p:nvSpPr>
+          <p:cNvPr id="6" name="Text 4"/>
           <p:cNvSpPr/>
           <p:nvPr/>
         </p:nvSpPr>
@@ -5064,7 +5338,7 @@
                 <a:ea typeface="Georgia" pitchFamily="34" charset="-122"/>
                 <a:cs typeface="Georgia" pitchFamily="34" charset="-120"/>
               </a:rPr>
-              <a:t>Homework</a:t>
+              <a:t>Lightning round (10 min) (cont.)</a:t>
             </a:r>
             <a:endParaRPr lang="en-US" sz="1800" dirty="0"/>
           </a:p>
@@ -5078,13 +5352,66 @@
         </p:nvSpPr>
         <p:spPr>
           <a:xfrm>
-            <a:off x="406301" y="870942"/>
-            <a:ext cx="8498026" cy="213271"/>
-          </a:xfrm>
-          <a:prstGeom prst="rect">
+            <a:off x="406301" y="883593"/>
+            <a:ext cx="8331398" cy="2523381"/>
+          </a:xfrm>
+          <a:prstGeom prst="rect">
+            <a:avLst/>
+          </a:prstGeom>
+          <a:solidFill>
+            <a:srgbClr val="FFFFFF"/>
+          </a:solidFill>
+          <a:ln/>
+        </p:spPr>
+        <p:txBody>
+          <a:bodyPr wrap="square" rtlCol="0" anchor="ctr"/>
+          <a:lstStyle/>
+          <a:p>
+            <a:pPr indent="0" marL="0">
+              <a:buNone/>
+            </a:pPr>
+            <a:endParaRPr lang="en-US" dirty="0"/>
+          </a:p>
+        </p:txBody>
+      </p:sp>
+      <p:sp>
+        <p:nvSpPr>
+          <p:cNvPr id="5" name="Shape 3"/>
+          <p:cNvSpPr/>
+          <p:nvPr/>
+        </p:nvSpPr>
+        <p:spPr>
+          <a:xfrm>
+            <a:off x="430113" y="883593"/>
+            <a:ext cx="0" cy="2523381"/>
+          </a:xfrm>
+          <a:prstGeom prst="line">
             <a:avLst/>
           </a:prstGeom>
           <a:noFill/>
+          <a:ln w="47625">
+            <a:solidFill>
+              <a:srgbClr val="87A96B"/>
+            </a:solidFill>
+            <a:prstDash val="solid"/>
+          </a:ln>
+        </p:spPr>
+      </p:sp>
+      <p:sp>
+        <p:nvSpPr>
+          <p:cNvPr id="6" name="Text 4"/>
+          <p:cNvSpPr/>
+          <p:nvPr/>
+        </p:nvSpPr>
+        <p:spPr>
+          <a:xfrm>
+            <a:off x="631627" y="1010543"/>
+            <a:ext cx="8086939" cy="174575"/>
+          </a:xfrm>
+          <a:prstGeom prst="rect">
+            <a:avLst/>
+          </a:prstGeom>
+          <a:noFill/>
           <a:ln/>
         </p:spPr>
         <p:txBody>
@@ -5093,34 +5420,532 @@
           <a:p>
             <a:pPr algn="l" indent="0" marL="0">
               <a:lnSpc>
-                <a:spcPts val="1680"/>
-              </a:lnSpc>
-              <a:spcBef>
-                <a:spcPts val="300"/>
-              </a:spcBef>
-              <a:spcAft>
-                <a:spcPts val="300"/>
-              </a:spcAft>
-              <a:buNone/>
-            </a:pPr>
-            <a:r>
-              <a:rPr lang="en-US" sz="1200" dirty="0">
+                <a:spcPts val="1375"/>
+              </a:lnSpc>
+              <a:buNone/>
+            </a:pPr>
+            <a:r>
+              <a:rPr lang="en-US" sz="1100" dirty="0">
                 <a:solidFill>
                   <a:srgbClr val="2C2C2C"/>
                 </a:solidFill>
-                <a:latin typeface="Verdana" pitchFamily="34" charset="0"/>
-                <a:ea typeface="Verdana" pitchFamily="34" charset="-122"/>
-                <a:cs typeface="Verdana" pitchFamily="34" charset="-120"/>
-              </a:rPr>
-              <a:t>– At home, have someone call out 10 digits in 30 seconds. You say the twin. Beat 8/10.</a:t>
-            </a:r>
-            <a:endParaRPr lang="en-US" sz="1200" dirty="0"/>
-          </a:p>
-        </p:txBody>
-      </p:sp>
-      <p:sp>
-        <p:nvSpPr>
-          <p:cNvPr id="5" name="Text 3"/>
+                <a:latin typeface="Courier New" pitchFamily="34" charset="0"/>
+                <a:ea typeface="Courier New" pitchFamily="34" charset="-122"/>
+                <a:cs typeface="Courier New" pitchFamily="34" charset="-120"/>
+              </a:rPr>
+              <a:t>7 → 3</a:t>
+            </a:r>
+            <a:endParaRPr lang="en-US" sz="1100" dirty="0"/>
+          </a:p>
+        </p:txBody>
+      </p:sp>
+      <p:sp>
+        <p:nvSpPr>
+          <p:cNvPr id="7" name="Text 5"/>
+          <p:cNvSpPr/>
+          <p:nvPr/>
+        </p:nvSpPr>
+        <p:spPr>
+          <a:xfrm>
+            <a:off x="631627" y="1185118"/>
+            <a:ext cx="8086939" cy="174575"/>
+          </a:xfrm>
+          <a:prstGeom prst="rect">
+            <a:avLst/>
+          </a:prstGeom>
+          <a:noFill/>
+          <a:ln/>
+        </p:spPr>
+        <p:txBody>
+          <a:bodyPr wrap="square" lIns="0" tIns="0" rIns="0" bIns="0" rtlCol="0" anchor="t"/>
+          <a:lstStyle/>
+          <a:p>
+            <a:pPr algn="l" indent="0" marL="0">
+              <a:lnSpc>
+                <a:spcPts val="1375"/>
+              </a:lnSpc>
+              <a:buNone/>
+            </a:pPr>
+            <a:r>
+              <a:rPr lang="en-US" sz="1100" dirty="0">
+                <a:solidFill>
+                  <a:srgbClr val="2C2C2C"/>
+                </a:solidFill>
+                <a:latin typeface="Courier New" pitchFamily="34" charset="0"/>
+                <a:ea typeface="Courier New" pitchFamily="34" charset="-122"/>
+                <a:cs typeface="Courier New" pitchFamily="34" charset="-120"/>
+              </a:rPr>
+              <a:t>8 → 2</a:t>
+            </a:r>
+            <a:endParaRPr lang="en-US" sz="1100" dirty="0"/>
+          </a:p>
+        </p:txBody>
+      </p:sp>
+      <p:sp>
+        <p:nvSpPr>
+          <p:cNvPr id="8" name="Text 6"/>
+          <p:cNvSpPr/>
+          <p:nvPr/>
+        </p:nvSpPr>
+        <p:spPr>
+          <a:xfrm>
+            <a:off x="631627" y="1359694"/>
+            <a:ext cx="8086939" cy="174575"/>
+          </a:xfrm>
+          <a:prstGeom prst="rect">
+            <a:avLst/>
+          </a:prstGeom>
+          <a:noFill/>
+          <a:ln/>
+        </p:spPr>
+        <p:txBody>
+          <a:bodyPr wrap="square" lIns="0" tIns="0" rIns="0" bIns="0" rtlCol="0" anchor="t"/>
+          <a:lstStyle/>
+          <a:p>
+            <a:pPr algn="l" indent="0" marL="0">
+              <a:lnSpc>
+                <a:spcPts val="1375"/>
+              </a:lnSpc>
+              <a:buNone/>
+            </a:pPr>
+            <a:r>
+              <a:rPr lang="en-US" sz="1100" dirty="0">
+                <a:solidFill>
+                  <a:srgbClr val="2C2C2C"/>
+                </a:solidFill>
+                <a:latin typeface="Courier New" pitchFamily="34" charset="0"/>
+                <a:ea typeface="Courier New" pitchFamily="34" charset="-122"/>
+                <a:cs typeface="Courier New" pitchFamily="34" charset="-120"/>
+              </a:rPr>
+              <a:t>6 → 4</a:t>
+            </a:r>
+            <a:endParaRPr lang="en-US" sz="1100" dirty="0"/>
+          </a:p>
+        </p:txBody>
+      </p:sp>
+      <p:sp>
+        <p:nvSpPr>
+          <p:cNvPr id="9" name="Text 7"/>
+          <p:cNvSpPr/>
+          <p:nvPr/>
+        </p:nvSpPr>
+        <p:spPr>
+          <a:xfrm>
+            <a:off x="631627" y="1534269"/>
+            <a:ext cx="8086939" cy="174575"/>
+          </a:xfrm>
+          <a:prstGeom prst="rect">
+            <a:avLst/>
+          </a:prstGeom>
+          <a:noFill/>
+          <a:ln/>
+        </p:spPr>
+        <p:txBody>
+          <a:bodyPr wrap="square" lIns="0" tIns="0" rIns="0" bIns="0" rtlCol="0" anchor="t"/>
+          <a:lstStyle/>
+          <a:p>
+            <a:pPr algn="l" indent="0" marL="0">
+              <a:lnSpc>
+                <a:spcPts val="1375"/>
+              </a:lnSpc>
+              <a:buNone/>
+            </a:pPr>
+            <a:r>
+              <a:rPr lang="en-US" sz="1100" dirty="0">
+                <a:solidFill>
+                  <a:srgbClr val="2C2C2C"/>
+                </a:solidFill>
+                <a:latin typeface="Courier New" pitchFamily="34" charset="0"/>
+                <a:ea typeface="Courier New" pitchFamily="34" charset="-122"/>
+                <a:cs typeface="Courier New" pitchFamily="34" charset="-120"/>
+              </a:rPr>
+              <a:t>9 → 1</a:t>
+            </a:r>
+            <a:endParaRPr lang="en-US" sz="1100" dirty="0"/>
+          </a:p>
+        </p:txBody>
+      </p:sp>
+      <p:sp>
+        <p:nvSpPr>
+          <p:cNvPr id="10" name="Text 8"/>
+          <p:cNvSpPr/>
+          <p:nvPr/>
+        </p:nvSpPr>
+        <p:spPr>
+          <a:xfrm>
+            <a:off x="631627" y="1708845"/>
+            <a:ext cx="8086939" cy="174575"/>
+          </a:xfrm>
+          <a:prstGeom prst="rect">
+            <a:avLst/>
+          </a:prstGeom>
+          <a:noFill/>
+          <a:ln/>
+        </p:spPr>
+        <p:txBody>
+          <a:bodyPr wrap="square" lIns="0" tIns="0" rIns="0" bIns="0" rtlCol="0" anchor="t"/>
+          <a:lstStyle/>
+          <a:p>
+            <a:pPr algn="l" indent="0" marL="0">
+              <a:lnSpc>
+                <a:spcPts val="1375"/>
+              </a:lnSpc>
+              <a:buNone/>
+            </a:pPr>
+            <a:r>
+              <a:rPr lang="en-US" sz="1100" dirty="0">
+                <a:solidFill>
+                  <a:srgbClr val="2C2C2C"/>
+                </a:solidFill>
+                <a:latin typeface="Courier New" pitchFamily="34" charset="0"/>
+                <a:ea typeface="Courier New" pitchFamily="34" charset="-122"/>
+                <a:cs typeface="Courier New" pitchFamily="34" charset="-120"/>
+              </a:rPr>
+              <a:t>5 → 5</a:t>
+            </a:r>
+            <a:endParaRPr lang="en-US" sz="1100" dirty="0"/>
+          </a:p>
+        </p:txBody>
+      </p:sp>
+      <p:sp>
+        <p:nvSpPr>
+          <p:cNvPr id="11" name="Text 9"/>
+          <p:cNvSpPr/>
+          <p:nvPr/>
+        </p:nvSpPr>
+        <p:spPr>
+          <a:xfrm>
+            <a:off x="631627" y="1883420"/>
+            <a:ext cx="8086939" cy="174575"/>
+          </a:xfrm>
+          <a:prstGeom prst="rect">
+            <a:avLst/>
+          </a:prstGeom>
+          <a:noFill/>
+          <a:ln/>
+        </p:spPr>
+        <p:txBody>
+          <a:bodyPr wrap="square" lIns="0" tIns="0" rIns="0" bIns="0" rtlCol="0" anchor="t"/>
+          <a:lstStyle/>
+          <a:p>
+            <a:pPr algn="l" indent="0" marL="0">
+              <a:lnSpc>
+                <a:spcPts val="1375"/>
+              </a:lnSpc>
+              <a:buNone/>
+            </a:pPr>
+            <a:r>
+              <a:rPr lang="en-US" sz="1100" dirty="0">
+                <a:solidFill>
+                  <a:srgbClr val="2C2C2C"/>
+                </a:solidFill>
+                <a:latin typeface="Courier New" pitchFamily="34" charset="0"/>
+                <a:ea typeface="Courier New" pitchFamily="34" charset="-122"/>
+                <a:cs typeface="Courier New" pitchFamily="34" charset="-120"/>
+              </a:rPr>
+              <a:t>4 → 6</a:t>
+            </a:r>
+            <a:endParaRPr lang="en-US" sz="1100" dirty="0"/>
+          </a:p>
+        </p:txBody>
+      </p:sp>
+      <p:sp>
+        <p:nvSpPr>
+          <p:cNvPr id="12" name="Text 10"/>
+          <p:cNvSpPr/>
+          <p:nvPr/>
+        </p:nvSpPr>
+        <p:spPr>
+          <a:xfrm>
+            <a:off x="631627" y="2057995"/>
+            <a:ext cx="8086939" cy="174575"/>
+          </a:xfrm>
+          <a:prstGeom prst="rect">
+            <a:avLst/>
+          </a:prstGeom>
+          <a:noFill/>
+          <a:ln/>
+        </p:spPr>
+        <p:txBody>
+          <a:bodyPr wrap="square" lIns="0" tIns="0" rIns="0" bIns="0" rtlCol="0" anchor="t"/>
+          <a:lstStyle/>
+          <a:p>
+            <a:pPr algn="l" indent="0" marL="0">
+              <a:lnSpc>
+                <a:spcPts val="1375"/>
+              </a:lnSpc>
+              <a:buNone/>
+            </a:pPr>
+            <a:r>
+              <a:rPr lang="en-US" sz="1100" dirty="0">
+                <a:solidFill>
+                  <a:srgbClr val="2C2C2C"/>
+                </a:solidFill>
+                <a:latin typeface="Courier New" pitchFamily="34" charset="0"/>
+                <a:ea typeface="Courier New" pitchFamily="34" charset="-122"/>
+                <a:cs typeface="Courier New" pitchFamily="34" charset="-120"/>
+              </a:rPr>
+              <a:t>3 → 7</a:t>
+            </a:r>
+            <a:endParaRPr lang="en-US" sz="1100" dirty="0"/>
+          </a:p>
+        </p:txBody>
+      </p:sp>
+      <p:sp>
+        <p:nvSpPr>
+          <p:cNvPr id="13" name="Text 11"/>
+          <p:cNvSpPr/>
+          <p:nvPr/>
+        </p:nvSpPr>
+        <p:spPr>
+          <a:xfrm>
+            <a:off x="631627" y="2232571"/>
+            <a:ext cx="8086939" cy="174575"/>
+          </a:xfrm>
+          <a:prstGeom prst="rect">
+            <a:avLst/>
+          </a:prstGeom>
+          <a:noFill/>
+          <a:ln/>
+        </p:spPr>
+        <p:txBody>
+          <a:bodyPr wrap="square" lIns="0" tIns="0" rIns="0" bIns="0" rtlCol="0" anchor="t"/>
+          <a:lstStyle/>
+          <a:p>
+            <a:pPr algn="l" indent="0" marL="0">
+              <a:lnSpc>
+                <a:spcPts val="1375"/>
+              </a:lnSpc>
+              <a:buNone/>
+            </a:pPr>
+            <a:r>
+              <a:rPr lang="en-US" sz="1100" dirty="0">
+                <a:solidFill>
+                  <a:srgbClr val="2C2C2C"/>
+                </a:solidFill>
+                <a:latin typeface="Courier New" pitchFamily="34" charset="0"/>
+                <a:ea typeface="Courier New" pitchFamily="34" charset="-122"/>
+                <a:cs typeface="Courier New" pitchFamily="34" charset="-120"/>
+              </a:rPr>
+              <a:t>2 → 8</a:t>
+            </a:r>
+            <a:endParaRPr lang="en-US" sz="1100" dirty="0"/>
+          </a:p>
+        </p:txBody>
+      </p:sp>
+      <p:sp>
+        <p:nvSpPr>
+          <p:cNvPr id="14" name="Text 12"/>
+          <p:cNvSpPr/>
+          <p:nvPr/>
+        </p:nvSpPr>
+        <p:spPr>
+          <a:xfrm>
+            <a:off x="631627" y="2407146"/>
+            <a:ext cx="8086939" cy="174575"/>
+          </a:xfrm>
+          <a:prstGeom prst="rect">
+            <a:avLst/>
+          </a:prstGeom>
+          <a:noFill/>
+          <a:ln/>
+        </p:spPr>
+        <p:txBody>
+          <a:bodyPr wrap="square" lIns="0" tIns="0" rIns="0" bIns="0" rtlCol="0" anchor="t"/>
+          <a:lstStyle/>
+          <a:p>
+            <a:pPr algn="l" indent="0" marL="0">
+              <a:lnSpc>
+                <a:spcPts val="1375"/>
+              </a:lnSpc>
+              <a:buNone/>
+            </a:pPr>
+            <a:r>
+              <a:rPr lang="en-US" sz="1100" dirty="0">
+                <a:solidFill>
+                  <a:srgbClr val="2C2C2C"/>
+                </a:solidFill>
+                <a:latin typeface="Courier New" pitchFamily="34" charset="0"/>
+                <a:ea typeface="Courier New" pitchFamily="34" charset="-122"/>
+                <a:cs typeface="Courier New" pitchFamily="34" charset="-120"/>
+              </a:rPr>
+              <a:t>1 → 9</a:t>
+            </a:r>
+            <a:endParaRPr lang="en-US" sz="1100" dirty="0"/>
+          </a:p>
+        </p:txBody>
+      </p:sp>
+      <p:sp>
+        <p:nvSpPr>
+          <p:cNvPr id="15" name="Text 13"/>
+          <p:cNvSpPr/>
+          <p:nvPr/>
+        </p:nvSpPr>
+        <p:spPr>
+          <a:xfrm>
+            <a:off x="631627" y="2581721"/>
+            <a:ext cx="8086939" cy="174575"/>
+          </a:xfrm>
+          <a:prstGeom prst="rect">
+            <a:avLst/>
+          </a:prstGeom>
+          <a:noFill/>
+          <a:ln/>
+        </p:spPr>
+        <p:txBody>
+          <a:bodyPr wrap="square" lIns="0" tIns="0" rIns="0" bIns="0" rtlCol="0" anchor="t"/>
+          <a:lstStyle/>
+          <a:p>
+            <a:pPr algn="l" indent="0" marL="0">
+              <a:lnSpc>
+                <a:spcPts val="1375"/>
+              </a:lnSpc>
+              <a:buNone/>
+            </a:pPr>
+            <a:r>
+              <a:rPr lang="en-US" sz="1100" dirty="0">
+                <a:solidFill>
+                  <a:srgbClr val="2C2C2C"/>
+                </a:solidFill>
+                <a:latin typeface="Courier New" pitchFamily="34" charset="0"/>
+                <a:ea typeface="Courier New" pitchFamily="34" charset="-122"/>
+                <a:cs typeface="Courier New" pitchFamily="34" charset="-120"/>
+              </a:rPr>
+              <a:t>8 → 2</a:t>
+            </a:r>
+            <a:endParaRPr lang="en-US" sz="1100" dirty="0"/>
+          </a:p>
+        </p:txBody>
+      </p:sp>
+      <p:sp>
+        <p:nvSpPr>
+          <p:cNvPr id="16" name="Text 14"/>
+          <p:cNvSpPr/>
+          <p:nvPr/>
+        </p:nvSpPr>
+        <p:spPr>
+          <a:xfrm>
+            <a:off x="631627" y="2756297"/>
+            <a:ext cx="8086939" cy="174575"/>
+          </a:xfrm>
+          <a:prstGeom prst="rect">
+            <a:avLst/>
+          </a:prstGeom>
+          <a:noFill/>
+          <a:ln/>
+        </p:spPr>
+        <p:txBody>
+          <a:bodyPr wrap="square" lIns="0" tIns="0" rIns="0" bIns="0" rtlCol="0" anchor="t"/>
+          <a:lstStyle/>
+          <a:p>
+            <a:pPr algn="l" indent="0" marL="0">
+              <a:lnSpc>
+                <a:spcPts val="1375"/>
+              </a:lnSpc>
+              <a:buNone/>
+            </a:pPr>
+            <a:r>
+              <a:rPr lang="en-US" sz="1100" dirty="0">
+                <a:solidFill>
+                  <a:srgbClr val="2C2C2C"/>
+                </a:solidFill>
+                <a:latin typeface="Courier New" pitchFamily="34" charset="0"/>
+                <a:ea typeface="Courier New" pitchFamily="34" charset="-122"/>
+                <a:cs typeface="Courier New" pitchFamily="34" charset="-120"/>
+              </a:rPr>
+              <a:t>6 → 4</a:t>
+            </a:r>
+            <a:endParaRPr lang="en-US" sz="1100" dirty="0"/>
+          </a:p>
+        </p:txBody>
+      </p:sp>
+      <p:sp>
+        <p:nvSpPr>
+          <p:cNvPr id="17" name="Text 15"/>
+          <p:cNvSpPr/>
+          <p:nvPr/>
+        </p:nvSpPr>
+        <p:spPr>
+          <a:xfrm>
+            <a:off x="631627" y="2930872"/>
+            <a:ext cx="8086939" cy="174575"/>
+          </a:xfrm>
+          <a:prstGeom prst="rect">
+            <a:avLst/>
+          </a:prstGeom>
+          <a:noFill/>
+          <a:ln/>
+        </p:spPr>
+        <p:txBody>
+          <a:bodyPr wrap="square" lIns="0" tIns="0" rIns="0" bIns="0" rtlCol="0" anchor="t"/>
+          <a:lstStyle/>
+          <a:p>
+            <a:pPr algn="l" indent="0" marL="0">
+              <a:lnSpc>
+                <a:spcPts val="1375"/>
+              </a:lnSpc>
+              <a:buNone/>
+            </a:pPr>
+            <a:r>
+              <a:rPr lang="en-US" sz="1100" dirty="0">
+                <a:solidFill>
+                  <a:srgbClr val="2C2C2C"/>
+                </a:solidFill>
+                <a:latin typeface="Courier New" pitchFamily="34" charset="0"/>
+                <a:ea typeface="Courier New" pitchFamily="34" charset="-122"/>
+                <a:cs typeface="Courier New" pitchFamily="34" charset="-120"/>
+              </a:rPr>
+              <a:t>7 → 3</a:t>
+            </a:r>
+            <a:endParaRPr lang="en-US" sz="1100" dirty="0"/>
+          </a:p>
+        </p:txBody>
+      </p:sp>
+      <p:sp>
+        <p:nvSpPr>
+          <p:cNvPr id="18" name="Text 16"/>
+          <p:cNvSpPr/>
+          <p:nvPr/>
+        </p:nvSpPr>
+        <p:spPr>
+          <a:xfrm>
+            <a:off x="631627" y="3105448"/>
+            <a:ext cx="8086939" cy="174575"/>
+          </a:xfrm>
+          <a:prstGeom prst="rect">
+            <a:avLst/>
+          </a:prstGeom>
+          <a:noFill/>
+          <a:ln/>
+        </p:spPr>
+        <p:txBody>
+          <a:bodyPr wrap="square" lIns="0" tIns="0" rIns="0" bIns="0" rtlCol="0" anchor="t"/>
+          <a:lstStyle/>
+          <a:p>
+            <a:pPr algn="l" indent="0" marL="0">
+              <a:lnSpc>
+                <a:spcPts val="1375"/>
+              </a:lnSpc>
+              <a:buNone/>
+            </a:pPr>
+            <a:r>
+              <a:rPr lang="en-US" sz="1100" dirty="0">
+                <a:solidFill>
+                  <a:srgbClr val="2C2C2C"/>
+                </a:solidFill>
+                <a:latin typeface="Courier New" pitchFamily="34" charset="0"/>
+                <a:ea typeface="Courier New" pitchFamily="34" charset="-122"/>
+                <a:cs typeface="Courier New" pitchFamily="34" charset="-120"/>
+              </a:rPr>
+              <a:t>...</a:t>
+            </a:r>
+            <a:endParaRPr lang="en-US" sz="1100" dirty="0"/>
+          </a:p>
+        </p:txBody>
+      </p:sp>
+      <p:sp>
+        <p:nvSpPr>
+          <p:cNvPr id="19" name="Text 17"/>
           <p:cNvSpPr/>
           <p:nvPr/>
         </p:nvSpPr>
